--- a/presentations/current/Sepsis_GenAI_DeepDivev6.pptx
+++ b/presentations/current/Sepsis_GenAI_DeepDivev6.pptx
@@ -5,7 +5,7 @@
     <p:sldMasterId id="2147483648" r:id="rId1"/>
   </p:sldMasterIdLst>
   <p:notesMasterIdLst>
-    <p:notesMasterId r:id="rId17"/>
+    <p:notesMasterId r:id="rId18"/>
   </p:notesMasterIdLst>
   <p:sldIdLst>
     <p:sldId id="256" r:id="rId2"/>
@@ -23,6 +23,7 @@
     <p:sldId id="266" r:id="rId14"/>
     <p:sldId id="267" r:id="rId15"/>
     <p:sldId id="275" r:id="rId16"/>
+    <p:sldId id="276" r:id="rId17"/>
   </p:sldIdLst>
   <p:sldSz cx="12192000" cy="6858000"/>
   <p:notesSz cx="6858000" cy="9144000"/>
@@ -757,6 +758,90 @@
     <p:extLst>
       <p:ext uri="{BB962C8B-B14F-4D97-AF65-F5344CB8AC3E}">
         <p14:creationId xmlns:p14="http://schemas.microsoft.com/office/powerpoint/2010/main" val="518000016"/>
+      </p:ext>
+    </p:extLst>
+  </p:cSld>
+  <p:clrMapOvr>
+    <a:masterClrMapping/>
+  </p:clrMapOvr>
+</p:notes>
+</file>
+
+<file path=ppt/notesSlides/notesSlide4.xml><?xml version="1.0" encoding="utf-8"?>
+<p:notes xmlns:a="http://schemas.openxmlformats.org/drawingml/2006/main" xmlns:r="http://schemas.openxmlformats.org/officeDocument/2006/relationships" xmlns:p="http://schemas.openxmlformats.org/presentationml/2006/main">
+  <p:cSld>
+    <p:spTree>
+      <p:nvGrpSpPr>
+        <p:cNvPr id="1" name=""/>
+        <p:cNvGrpSpPr/>
+        <p:nvPr/>
+      </p:nvGrpSpPr>
+      <p:grpSpPr>
+        <a:xfrm>
+          <a:off x="0" y="0"/>
+          <a:ext cx="0" cy="0"/>
+          <a:chOff x="0" y="0"/>
+          <a:chExt cx="0" cy="0"/>
+        </a:xfrm>
+      </p:grpSpPr>
+      <p:sp>
+        <p:nvSpPr>
+          <p:cNvPr id="2" name="Slide Image Placeholder 1"/>
+          <p:cNvSpPr>
+            <a:spLocks noGrp="1" noRot="1" noChangeAspect="1"/>
+          </p:cNvSpPr>
+          <p:nvPr>
+            <p:ph type="sldImg"/>
+          </p:nvPr>
+        </p:nvSpPr>
+        <p:spPr/>
+      </p:sp>
+      <p:sp>
+        <p:nvSpPr>
+          <p:cNvPr id="3" name="Notes Placeholder 2"/>
+          <p:cNvSpPr>
+            <a:spLocks noGrp="1"/>
+          </p:cNvSpPr>
+          <p:nvPr>
+            <p:ph type="body" idx="1"/>
+          </p:nvPr>
+        </p:nvSpPr>
+        <p:spPr/>
+        <p:txBody>
+          <a:bodyPr/>
+          <a:lstStyle/>
+          <a:p>
+            <a:endParaRPr lang="en-US" dirty="0"/>
+          </a:p>
+        </p:txBody>
+      </p:sp>
+      <p:sp>
+        <p:nvSpPr>
+          <p:cNvPr id="4" name="Slide Number Placeholder 3"/>
+          <p:cNvSpPr>
+            <a:spLocks noGrp="1"/>
+          </p:cNvSpPr>
+          <p:nvPr>
+            <p:ph type="sldNum" sz="quarter" idx="5"/>
+          </p:nvPr>
+        </p:nvSpPr>
+        <p:spPr/>
+        <p:txBody>
+          <a:bodyPr/>
+          <a:lstStyle/>
+          <a:p>
+            <a:fld id="{B12707B4-37C3-5E48-A75A-89027B4B7FBD}" type="slidenum">
+              <a:rPr lang="en-US" smtClean="0"/>
+              <a:t>16</a:t>
+            </a:fld>
+            <a:endParaRPr lang="en-US"/>
+          </a:p>
+        </p:txBody>
+      </p:sp>
+    </p:spTree>
+    <p:extLst>
+      <p:ext uri="{BB962C8B-B14F-4D97-AF65-F5344CB8AC3E}">
+        <p14:creationId xmlns:p14="http://schemas.microsoft.com/office/powerpoint/2010/main" val="2874492624"/>
       </p:ext>
     </p:extLst>
   </p:cSld>
@@ -16071,13 +16156,31 @@
           <a:lstStyle/>
           <a:p>
             <a:r>
-              <a:rPr sz="2400" b="1">
+              <a:rPr sz="2400" b="1" dirty="0">
                 <a:solidFill>
                   <a:srgbClr val="1E6C93"/>
                 </a:solidFill>
                 <a:latin typeface="Calibri"/>
               </a:rPr>
-              <a:t>Validation — Phase 1B (eICU-CRD Demo, Real Nurse Notes)</a:t>
+              <a:t>Validation — Phase 1B (</a:t>
+            </a:r>
+            <a:r>
+              <a:rPr sz="2400" b="1" dirty="0" err="1">
+                <a:solidFill>
+                  <a:srgbClr val="1E6C93"/>
+                </a:solidFill>
+                <a:latin typeface="Calibri"/>
+              </a:rPr>
+              <a:t>eICU</a:t>
+            </a:r>
+            <a:r>
+              <a:rPr sz="2400" b="1" dirty="0">
+                <a:solidFill>
+                  <a:srgbClr val="1E6C93"/>
+                </a:solidFill>
+                <a:latin typeface="Calibri"/>
+              </a:rPr>
+              <a:t>-CRD Demo, Real Nurse Notes)</a:t>
             </a:r>
           </a:p>
         </p:txBody>
@@ -16724,7 +16827,7 @@
           <a:p>
             <a:pPr algn="ctr"/>
             <a:r>
-              <a:rPr sz="1000" b="1">
+              <a:rPr sz="1000" b="1" dirty="0">
                 <a:solidFill>
                   <a:srgbClr val="556677"/>
                 </a:solidFill>
@@ -16759,7 +16862,7 @@
           <a:p>
             <a:pPr algn="ctr"/>
             <a:r>
-              <a:rPr sz="2200" b="1">
+              <a:rPr sz="2200" b="1" dirty="0">
                 <a:solidFill>
                   <a:srgbClr val="2E7D32"/>
                 </a:solidFill>
@@ -16794,7 +16897,7 @@
           <a:p>
             <a:pPr algn="ctr"/>
             <a:r>
-              <a:rPr sz="900" b="0">
+              <a:rPr sz="900" b="0" dirty="0">
                 <a:solidFill>
                   <a:srgbClr val="1F2F3F"/>
                 </a:solidFill>
@@ -16829,7 +16932,7 @@
           <a:p>
             <a:pPr algn="ctr"/>
             <a:r>
-              <a:rPr sz="800" b="0">
+              <a:rPr sz="800" b="0" dirty="0">
                 <a:solidFill>
                   <a:srgbClr val="556677"/>
                 </a:solidFill>
@@ -19402,6 +19505,3585 @@
         </p:txBody>
       </p:sp>
     </p:spTree>
+  </p:cSld>
+  <p:clrMapOvr>
+    <a:masterClrMapping/>
+  </p:clrMapOvr>
+</p:sld>
+</file>
+
+<file path=ppt/slides/slide16.xml><?xml version="1.0" encoding="utf-8"?>
+<p:sld xmlns:a="http://schemas.openxmlformats.org/drawingml/2006/main" xmlns:r="http://schemas.openxmlformats.org/officeDocument/2006/relationships" xmlns:p="http://schemas.openxmlformats.org/presentationml/2006/main">
+  <p:cSld>
+    <p:spTree>
+      <p:nvGrpSpPr>
+        <p:cNvPr id="1" name="">
+          <a:extLst>
+            <a:ext uri="{FF2B5EF4-FFF2-40B4-BE49-F238E27FC236}">
+              <a16:creationId xmlns:a16="http://schemas.microsoft.com/office/drawing/2014/main" id="{5C307ECC-BC4B-0DDA-A0D2-EDB83B535485}"/>
+            </a:ext>
+          </a:extLst>
+        </p:cNvPr>
+        <p:cNvGrpSpPr/>
+        <p:nvPr/>
+      </p:nvGrpSpPr>
+      <p:grpSpPr>
+        <a:xfrm>
+          <a:off x="0" y="0"/>
+          <a:ext cx="0" cy="0"/>
+          <a:chOff x="0" y="0"/>
+          <a:chExt cx="0" cy="0"/>
+        </a:xfrm>
+      </p:grpSpPr>
+      <p:sp>
+        <p:nvSpPr>
+          <p:cNvPr id="2" name="Rectangle 1">
+            <a:extLst>
+              <a:ext uri="{FF2B5EF4-FFF2-40B4-BE49-F238E27FC236}">
+                <a16:creationId xmlns:a16="http://schemas.microsoft.com/office/drawing/2014/main" id="{E40DD80A-5624-4C92-D5B7-53F0FC060747}"/>
+              </a:ext>
+            </a:extLst>
+          </p:cNvPr>
+          <p:cNvSpPr/>
+          <p:nvPr/>
+        </p:nvSpPr>
+        <p:spPr>
+          <a:xfrm>
+            <a:off x="0" y="0"/>
+            <a:ext cx="12188952" cy="73152"/>
+          </a:xfrm>
+          <a:prstGeom prst="rect">
+            <a:avLst/>
+          </a:prstGeom>
+          <a:solidFill>
+            <a:srgbClr val="1E6C93"/>
+          </a:solidFill>
+          <a:ln>
+            <a:noFill/>
+          </a:ln>
+          <a:effectLst/>
+        </p:spPr>
+        <p:style>
+          <a:lnRef idx="1">
+            <a:schemeClr val="accent1"/>
+          </a:lnRef>
+          <a:fillRef idx="3">
+            <a:schemeClr val="accent1"/>
+          </a:fillRef>
+          <a:effectRef idx="2">
+            <a:schemeClr val="accent1"/>
+          </a:effectRef>
+          <a:fontRef idx="minor">
+            <a:schemeClr val="lt1"/>
+          </a:fontRef>
+        </p:style>
+        <p:txBody>
+          <a:bodyPr rtlCol="0" anchor="ctr"/>
+          <a:lstStyle/>
+          <a:p>
+            <a:pPr algn="ctr"/>
+            <a:endParaRPr/>
+          </a:p>
+        </p:txBody>
+      </p:sp>
+      <p:sp>
+        <p:nvSpPr>
+          <p:cNvPr id="3" name="Rectangle 2">
+            <a:extLst>
+              <a:ext uri="{FF2B5EF4-FFF2-40B4-BE49-F238E27FC236}">
+                <a16:creationId xmlns:a16="http://schemas.microsoft.com/office/drawing/2014/main" id="{9B262176-F4BF-CDD0-D0EB-21979761AF08}"/>
+              </a:ext>
+            </a:extLst>
+          </p:cNvPr>
+          <p:cNvSpPr/>
+          <p:nvPr/>
+        </p:nvSpPr>
+        <p:spPr>
+          <a:xfrm>
+            <a:off x="0" y="73152"/>
+            <a:ext cx="365760" cy="6784848"/>
+          </a:xfrm>
+          <a:prstGeom prst="rect">
+            <a:avLst/>
+          </a:prstGeom>
+          <a:solidFill>
+            <a:srgbClr val="49AAD4"/>
+          </a:solidFill>
+          <a:ln>
+            <a:noFill/>
+          </a:ln>
+          <a:effectLst/>
+        </p:spPr>
+        <p:style>
+          <a:lnRef idx="1">
+            <a:schemeClr val="accent1"/>
+          </a:lnRef>
+          <a:fillRef idx="3">
+            <a:schemeClr val="accent1"/>
+          </a:fillRef>
+          <a:effectRef idx="2">
+            <a:schemeClr val="accent1"/>
+          </a:effectRef>
+          <a:fontRef idx="minor">
+            <a:schemeClr val="lt1"/>
+          </a:fontRef>
+        </p:style>
+        <p:txBody>
+          <a:bodyPr rtlCol="0" anchor="ctr"/>
+          <a:lstStyle/>
+          <a:p>
+            <a:pPr algn="ctr"/>
+            <a:endParaRPr/>
+          </a:p>
+        </p:txBody>
+      </p:sp>
+      <p:sp>
+        <p:nvSpPr>
+          <p:cNvPr id="4" name="TextBox 3">
+            <a:extLst>
+              <a:ext uri="{FF2B5EF4-FFF2-40B4-BE49-F238E27FC236}">
+                <a16:creationId xmlns:a16="http://schemas.microsoft.com/office/drawing/2014/main" id="{463850FA-46F5-D240-A683-05561300DE69}"/>
+              </a:ext>
+            </a:extLst>
+          </p:cNvPr>
+          <p:cNvSpPr txBox="1"/>
+          <p:nvPr/>
+        </p:nvSpPr>
+        <p:spPr>
+          <a:xfrm>
+            <a:off x="630936" y="246888"/>
+            <a:ext cx="10972800" cy="405683"/>
+          </a:xfrm>
+          <a:prstGeom prst="rect">
+            <a:avLst/>
+          </a:prstGeom>
+          <a:noFill/>
+        </p:spPr>
+        <p:txBody>
+          <a:bodyPr wrap="square" lIns="36000" tIns="18000" rIns="36000" bIns="18000">
+            <a:spAutoFit/>
+          </a:bodyPr>
+          <a:lstStyle/>
+          <a:p>
+            <a:r>
+              <a:rPr sz="2400" b="1" dirty="0">
+                <a:solidFill>
+                  <a:srgbClr val="1E6C93"/>
+                </a:solidFill>
+                <a:latin typeface="Calibri"/>
+              </a:rPr>
+              <a:t>Validation — (</a:t>
+            </a:r>
+            <a:r>
+              <a:rPr sz="2400" b="1" dirty="0" err="1">
+                <a:solidFill>
+                  <a:srgbClr val="1E6C93"/>
+                </a:solidFill>
+                <a:latin typeface="Calibri"/>
+              </a:rPr>
+              <a:t>eICU</a:t>
+            </a:r>
+            <a:r>
+              <a:rPr sz="2400" b="1" dirty="0">
+                <a:solidFill>
+                  <a:srgbClr val="1E6C93"/>
+                </a:solidFill>
+                <a:latin typeface="Calibri"/>
+              </a:rPr>
+              <a:t>-CRD Demo, Real Nurse Notes)</a:t>
+            </a:r>
+          </a:p>
+        </p:txBody>
+      </p:sp>
+      <p:sp>
+        <p:nvSpPr>
+          <p:cNvPr id="5" name="Rectangle 4">
+            <a:extLst>
+              <a:ext uri="{FF2B5EF4-FFF2-40B4-BE49-F238E27FC236}">
+                <a16:creationId xmlns:a16="http://schemas.microsoft.com/office/drawing/2014/main" id="{063CEE34-40C9-58E2-2D6C-BB7B8D26753B}"/>
+              </a:ext>
+            </a:extLst>
+          </p:cNvPr>
+          <p:cNvSpPr/>
+          <p:nvPr/>
+        </p:nvSpPr>
+        <p:spPr>
+          <a:xfrm>
+            <a:off x="731520" y="777240"/>
+            <a:ext cx="3657600" cy="36576"/>
+          </a:xfrm>
+          <a:prstGeom prst="rect">
+            <a:avLst/>
+          </a:prstGeom>
+          <a:solidFill>
+            <a:srgbClr val="49AAD4"/>
+          </a:solidFill>
+          <a:ln>
+            <a:noFill/>
+          </a:ln>
+          <a:effectLst/>
+        </p:spPr>
+        <p:style>
+          <a:lnRef idx="1">
+            <a:schemeClr val="accent1"/>
+          </a:lnRef>
+          <a:fillRef idx="3">
+            <a:schemeClr val="accent1"/>
+          </a:fillRef>
+          <a:effectRef idx="2">
+            <a:schemeClr val="accent1"/>
+          </a:effectRef>
+          <a:fontRef idx="minor">
+            <a:schemeClr val="lt1"/>
+          </a:fontRef>
+        </p:style>
+        <p:txBody>
+          <a:bodyPr rtlCol="0" anchor="ctr"/>
+          <a:lstStyle/>
+          <a:p>
+            <a:pPr algn="ctr"/>
+            <a:endParaRPr/>
+          </a:p>
+        </p:txBody>
+      </p:sp>
+      <p:sp>
+        <p:nvSpPr>
+          <p:cNvPr id="6" name="TextBox 5">
+            <a:extLst>
+              <a:ext uri="{FF2B5EF4-FFF2-40B4-BE49-F238E27FC236}">
+                <a16:creationId xmlns:a16="http://schemas.microsoft.com/office/drawing/2014/main" id="{F5EE8E76-6D7C-D863-C196-DBBA885EF08C}"/>
+              </a:ext>
+            </a:extLst>
+          </p:cNvPr>
+          <p:cNvSpPr txBox="1"/>
+          <p:nvPr/>
+        </p:nvSpPr>
+        <p:spPr>
+          <a:xfrm>
+            <a:off x="731520" y="841248"/>
+            <a:ext cx="10972800" cy="190240"/>
+          </a:xfrm>
+          <a:prstGeom prst="rect">
+            <a:avLst/>
+          </a:prstGeom>
+          <a:noFill/>
+        </p:spPr>
+        <p:txBody>
+          <a:bodyPr wrap="square" lIns="36000" tIns="18000" rIns="36000" bIns="18000">
+            <a:spAutoFit/>
+          </a:bodyPr>
+          <a:lstStyle/>
+          <a:p>
+            <a:r>
+              <a:rPr sz="1000" b="0" dirty="0">
+                <a:solidFill>
+                  <a:srgbClr val="556677"/>
+                </a:solidFill>
+                <a:latin typeface="Calibri"/>
+              </a:rPr>
+              <a:t>90 ICU patients (30 sepsis + 60 controls) • 186 US hospitals • Open access dataset • May 1, 2026</a:t>
+            </a:r>
+          </a:p>
+        </p:txBody>
+      </p:sp>
+      <p:sp>
+        <p:nvSpPr>
+          <p:cNvPr id="7" name="Rectangle 6">
+            <a:extLst>
+              <a:ext uri="{FF2B5EF4-FFF2-40B4-BE49-F238E27FC236}">
+                <a16:creationId xmlns:a16="http://schemas.microsoft.com/office/drawing/2014/main" id="{D0214C90-F1DD-4600-CA3A-0E4956AE3226}"/>
+              </a:ext>
+            </a:extLst>
+          </p:cNvPr>
+          <p:cNvSpPr/>
+          <p:nvPr/>
+        </p:nvSpPr>
+        <p:spPr>
+          <a:xfrm>
+            <a:off x="548640" y="1207008"/>
+            <a:ext cx="5303520" cy="2240280"/>
+          </a:xfrm>
+          <a:prstGeom prst="rect">
+            <a:avLst/>
+          </a:prstGeom>
+          <a:solidFill>
+            <a:srgbClr val="E8F4F8"/>
+          </a:solidFill>
+          <a:ln>
+            <a:noFill/>
+          </a:ln>
+          <a:effectLst/>
+        </p:spPr>
+        <p:style>
+          <a:lnRef idx="1">
+            <a:schemeClr val="accent1"/>
+          </a:lnRef>
+          <a:fillRef idx="3">
+            <a:schemeClr val="accent1"/>
+          </a:fillRef>
+          <a:effectRef idx="2">
+            <a:schemeClr val="accent1"/>
+          </a:effectRef>
+          <a:fontRef idx="minor">
+            <a:schemeClr val="lt1"/>
+          </a:fontRef>
+        </p:style>
+        <p:txBody>
+          <a:bodyPr rtlCol="0" anchor="ctr"/>
+          <a:lstStyle/>
+          <a:p>
+            <a:pPr algn="ctr"/>
+            <a:endParaRPr/>
+          </a:p>
+        </p:txBody>
+      </p:sp>
+      <p:sp>
+        <p:nvSpPr>
+          <p:cNvPr id="8" name="Rectangle 7">
+            <a:extLst>
+              <a:ext uri="{FF2B5EF4-FFF2-40B4-BE49-F238E27FC236}">
+                <a16:creationId xmlns:a16="http://schemas.microsoft.com/office/drawing/2014/main" id="{ECC62A71-2143-CE03-29C8-6BE8E0EBA314}"/>
+              </a:ext>
+            </a:extLst>
+          </p:cNvPr>
+          <p:cNvSpPr/>
+          <p:nvPr/>
+        </p:nvSpPr>
+        <p:spPr>
+          <a:xfrm>
+            <a:off x="548640" y="1207008"/>
+            <a:ext cx="91440" cy="2240280"/>
+          </a:xfrm>
+          <a:prstGeom prst="rect">
+            <a:avLst/>
+          </a:prstGeom>
+          <a:solidFill>
+            <a:srgbClr val="1E6C93"/>
+          </a:solidFill>
+          <a:ln>
+            <a:noFill/>
+          </a:ln>
+          <a:effectLst/>
+        </p:spPr>
+        <p:style>
+          <a:lnRef idx="1">
+            <a:schemeClr val="accent1"/>
+          </a:lnRef>
+          <a:fillRef idx="3">
+            <a:schemeClr val="accent1"/>
+          </a:fillRef>
+          <a:effectRef idx="2">
+            <a:schemeClr val="accent1"/>
+          </a:effectRef>
+          <a:fontRef idx="minor">
+            <a:schemeClr val="lt1"/>
+          </a:fontRef>
+        </p:style>
+        <p:txBody>
+          <a:bodyPr rtlCol="0" anchor="ctr"/>
+          <a:lstStyle/>
+          <a:p>
+            <a:pPr algn="ctr"/>
+            <a:endParaRPr/>
+          </a:p>
+        </p:txBody>
+      </p:sp>
+      <p:sp>
+        <p:nvSpPr>
+          <p:cNvPr id="9" name="TextBox 8">
+            <a:extLst>
+              <a:ext uri="{FF2B5EF4-FFF2-40B4-BE49-F238E27FC236}">
+                <a16:creationId xmlns:a16="http://schemas.microsoft.com/office/drawing/2014/main" id="{19411A6B-DD0B-600D-E3BF-1C00F9A83C62}"/>
+              </a:ext>
+            </a:extLst>
+          </p:cNvPr>
+          <p:cNvSpPr txBox="1"/>
+          <p:nvPr/>
+        </p:nvSpPr>
+        <p:spPr>
+          <a:xfrm>
+            <a:off x="777240" y="1280160"/>
+            <a:ext cx="5029200" cy="274320"/>
+          </a:xfrm>
+          <a:prstGeom prst="rect">
+            <a:avLst/>
+          </a:prstGeom>
+          <a:noFill/>
+        </p:spPr>
+        <p:txBody>
+          <a:bodyPr wrap="square" lIns="36000" tIns="18000" rIns="36000" bIns="18000">
+            <a:spAutoFit/>
+          </a:bodyPr>
+          <a:lstStyle/>
+          <a:p>
+            <a:r>
+              <a:rPr sz="1300" b="1">
+                <a:solidFill>
+                  <a:srgbClr val="1E6C93"/>
+                </a:solidFill>
+                <a:latin typeface="Calibri"/>
+              </a:rPr>
+              <a:t>Headline Result (locked, byte-reproducible)</a:t>
+            </a:r>
+          </a:p>
+        </p:txBody>
+      </p:sp>
+      <p:sp>
+        <p:nvSpPr>
+          <p:cNvPr id="10" name="Rectangle 9">
+            <a:extLst>
+              <a:ext uri="{FF2B5EF4-FFF2-40B4-BE49-F238E27FC236}">
+                <a16:creationId xmlns:a16="http://schemas.microsoft.com/office/drawing/2014/main" id="{53B9E585-5D02-19E2-DE60-490EA58BD407}"/>
+              </a:ext>
+            </a:extLst>
+          </p:cNvPr>
+          <p:cNvSpPr/>
+          <p:nvPr/>
+        </p:nvSpPr>
+        <p:spPr>
+          <a:xfrm>
+            <a:off x="1581912" y="1600200"/>
+            <a:ext cx="1234440" cy="1691640"/>
+          </a:xfrm>
+          <a:prstGeom prst="rect">
+            <a:avLst/>
+          </a:prstGeom>
+          <a:solidFill>
+            <a:srgbClr val="FFFFFF"/>
+          </a:solidFill>
+          <a:ln>
+            <a:noFill/>
+          </a:ln>
+          <a:effectLst/>
+        </p:spPr>
+        <p:style>
+          <a:lnRef idx="1">
+            <a:schemeClr val="accent1"/>
+          </a:lnRef>
+          <a:fillRef idx="3">
+            <a:schemeClr val="accent1"/>
+          </a:fillRef>
+          <a:effectRef idx="2">
+            <a:schemeClr val="accent1"/>
+          </a:effectRef>
+          <a:fontRef idx="minor">
+            <a:schemeClr val="lt1"/>
+          </a:fontRef>
+        </p:style>
+        <p:txBody>
+          <a:bodyPr rtlCol="0" anchor="ctr"/>
+          <a:lstStyle/>
+          <a:p>
+            <a:pPr algn="ctr"/>
+            <a:endParaRPr/>
+          </a:p>
+        </p:txBody>
+      </p:sp>
+      <p:sp>
+        <p:nvSpPr>
+          <p:cNvPr id="11" name="TextBox 10">
+            <a:extLst>
+              <a:ext uri="{FF2B5EF4-FFF2-40B4-BE49-F238E27FC236}">
+                <a16:creationId xmlns:a16="http://schemas.microsoft.com/office/drawing/2014/main" id="{ADC6CEDA-9BF2-1958-3928-03F255DB878A}"/>
+              </a:ext>
+            </a:extLst>
+          </p:cNvPr>
+          <p:cNvSpPr txBox="1"/>
+          <p:nvPr/>
+        </p:nvSpPr>
+        <p:spPr>
+          <a:xfrm>
+            <a:off x="1581912" y="1664208"/>
+            <a:ext cx="1234440" cy="256032"/>
+          </a:xfrm>
+          <a:prstGeom prst="rect">
+            <a:avLst/>
+          </a:prstGeom>
+          <a:noFill/>
+        </p:spPr>
+        <p:txBody>
+          <a:bodyPr wrap="square" lIns="36000" tIns="18000" rIns="36000" bIns="18000">
+            <a:spAutoFit/>
+          </a:bodyPr>
+          <a:lstStyle/>
+          <a:p>
+            <a:pPr algn="ctr"/>
+            <a:r>
+              <a:rPr sz="1000" b="1" dirty="0">
+                <a:solidFill>
+                  <a:srgbClr val="556677"/>
+                </a:solidFill>
+                <a:latin typeface="Calibri"/>
+              </a:rPr>
+              <a:t>Sensitivity</a:t>
+            </a:r>
+          </a:p>
+        </p:txBody>
+      </p:sp>
+      <p:sp>
+        <p:nvSpPr>
+          <p:cNvPr id="12" name="TextBox 11">
+            <a:extLst>
+              <a:ext uri="{FF2B5EF4-FFF2-40B4-BE49-F238E27FC236}">
+                <a16:creationId xmlns:a16="http://schemas.microsoft.com/office/drawing/2014/main" id="{B49EEC18-39F9-7702-9960-7E02A09FE81C}"/>
+              </a:ext>
+            </a:extLst>
+          </p:cNvPr>
+          <p:cNvSpPr txBox="1"/>
+          <p:nvPr/>
+        </p:nvSpPr>
+        <p:spPr>
+          <a:xfrm>
+            <a:off x="1581912" y="1911096"/>
+            <a:ext cx="1234440" cy="502920"/>
+          </a:xfrm>
+          <a:prstGeom prst="rect">
+            <a:avLst/>
+          </a:prstGeom>
+          <a:noFill/>
+        </p:spPr>
+        <p:txBody>
+          <a:bodyPr wrap="square" lIns="36000" tIns="18000" rIns="36000" bIns="18000">
+            <a:spAutoFit/>
+          </a:bodyPr>
+          <a:lstStyle/>
+          <a:p>
+            <a:pPr algn="ctr"/>
+            <a:r>
+              <a:rPr sz="2200" b="1">
+                <a:solidFill>
+                  <a:srgbClr val="2E7D32"/>
+                </a:solidFill>
+                <a:latin typeface="Calibri"/>
+              </a:rPr>
+              <a:t>73.33%</a:t>
+            </a:r>
+          </a:p>
+        </p:txBody>
+      </p:sp>
+      <p:sp>
+        <p:nvSpPr>
+          <p:cNvPr id="13" name="TextBox 12">
+            <a:extLst>
+              <a:ext uri="{FF2B5EF4-FFF2-40B4-BE49-F238E27FC236}">
+                <a16:creationId xmlns:a16="http://schemas.microsoft.com/office/drawing/2014/main" id="{CA18A408-1218-EA87-73D4-C434E127F36D}"/>
+              </a:ext>
+            </a:extLst>
+          </p:cNvPr>
+          <p:cNvSpPr txBox="1"/>
+          <p:nvPr/>
+        </p:nvSpPr>
+        <p:spPr>
+          <a:xfrm>
+            <a:off x="1581912" y="2459736"/>
+            <a:ext cx="1234440" cy="228600"/>
+          </a:xfrm>
+          <a:prstGeom prst="rect">
+            <a:avLst/>
+          </a:prstGeom>
+          <a:noFill/>
+        </p:spPr>
+        <p:txBody>
+          <a:bodyPr wrap="square" lIns="36000" tIns="18000" rIns="36000" bIns="18000">
+            <a:spAutoFit/>
+          </a:bodyPr>
+          <a:lstStyle/>
+          <a:p>
+            <a:pPr algn="ctr"/>
+            <a:r>
+              <a:rPr sz="900" b="0">
+                <a:solidFill>
+                  <a:srgbClr val="1F2F3F"/>
+                </a:solidFill>
+                <a:latin typeface="Calibri"/>
+              </a:rPr>
+              <a:t>22 / 30</a:t>
+            </a:r>
+          </a:p>
+        </p:txBody>
+      </p:sp>
+      <p:sp>
+        <p:nvSpPr>
+          <p:cNvPr id="14" name="TextBox 13">
+            <a:extLst>
+              <a:ext uri="{FF2B5EF4-FFF2-40B4-BE49-F238E27FC236}">
+                <a16:creationId xmlns:a16="http://schemas.microsoft.com/office/drawing/2014/main" id="{C42FEF2F-AF77-F592-A241-82264DE3F440}"/>
+              </a:ext>
+            </a:extLst>
+          </p:cNvPr>
+          <p:cNvSpPr txBox="1"/>
+          <p:nvPr/>
+        </p:nvSpPr>
+        <p:spPr>
+          <a:xfrm>
+            <a:off x="1581912" y="2715768"/>
+            <a:ext cx="1234440" cy="457200"/>
+          </a:xfrm>
+          <a:prstGeom prst="rect">
+            <a:avLst/>
+          </a:prstGeom>
+          <a:noFill/>
+        </p:spPr>
+        <p:txBody>
+          <a:bodyPr wrap="square" lIns="36000" tIns="18000" rIns="36000" bIns="18000">
+            <a:spAutoFit/>
+          </a:bodyPr>
+          <a:lstStyle/>
+          <a:p>
+            <a:pPr algn="ctr"/>
+            <a:r>
+              <a:rPr sz="800" b="0">
+                <a:solidFill>
+                  <a:srgbClr val="556677"/>
+                </a:solidFill>
+                <a:latin typeface="Calibri"/>
+              </a:rPr>
+              <a:t>95% CI 55.6 – 85.8</a:t>
+            </a:r>
+          </a:p>
+        </p:txBody>
+      </p:sp>
+      <p:sp>
+        <p:nvSpPr>
+          <p:cNvPr id="15" name="Rectangle 14">
+            <a:extLst>
+              <a:ext uri="{FF2B5EF4-FFF2-40B4-BE49-F238E27FC236}">
+                <a16:creationId xmlns:a16="http://schemas.microsoft.com/office/drawing/2014/main" id="{6B9AB541-DB6D-B869-C62D-44BCEFB71A0C}"/>
+              </a:ext>
+            </a:extLst>
+          </p:cNvPr>
+          <p:cNvSpPr/>
+          <p:nvPr/>
+        </p:nvSpPr>
+        <p:spPr>
+          <a:xfrm>
+            <a:off x="3749040" y="1627632"/>
+            <a:ext cx="1234440" cy="1691640"/>
+          </a:xfrm>
+          <a:prstGeom prst="rect">
+            <a:avLst/>
+          </a:prstGeom>
+          <a:solidFill>
+            <a:srgbClr val="FFFFFF"/>
+          </a:solidFill>
+          <a:ln>
+            <a:noFill/>
+          </a:ln>
+          <a:effectLst/>
+        </p:spPr>
+        <p:style>
+          <a:lnRef idx="1">
+            <a:schemeClr val="accent1"/>
+          </a:lnRef>
+          <a:fillRef idx="3">
+            <a:schemeClr val="accent1"/>
+          </a:fillRef>
+          <a:effectRef idx="2">
+            <a:schemeClr val="accent1"/>
+          </a:effectRef>
+          <a:fontRef idx="minor">
+            <a:schemeClr val="lt1"/>
+          </a:fontRef>
+        </p:style>
+        <p:txBody>
+          <a:bodyPr rtlCol="0" anchor="ctr"/>
+          <a:lstStyle/>
+          <a:p>
+            <a:pPr algn="ctr"/>
+            <a:endParaRPr/>
+          </a:p>
+        </p:txBody>
+      </p:sp>
+      <p:sp>
+        <p:nvSpPr>
+          <p:cNvPr id="16" name="TextBox 15">
+            <a:extLst>
+              <a:ext uri="{FF2B5EF4-FFF2-40B4-BE49-F238E27FC236}">
+                <a16:creationId xmlns:a16="http://schemas.microsoft.com/office/drawing/2014/main" id="{D6B57C8B-683C-F437-65E7-036E73AB78B0}"/>
+              </a:ext>
+            </a:extLst>
+          </p:cNvPr>
+          <p:cNvSpPr txBox="1"/>
+          <p:nvPr/>
+        </p:nvSpPr>
+        <p:spPr>
+          <a:xfrm>
+            <a:off x="3771900" y="1719072"/>
+            <a:ext cx="1234440" cy="256032"/>
+          </a:xfrm>
+          <a:prstGeom prst="rect">
+            <a:avLst/>
+          </a:prstGeom>
+          <a:noFill/>
+        </p:spPr>
+        <p:txBody>
+          <a:bodyPr wrap="square" lIns="36000" tIns="18000" rIns="36000" bIns="18000">
+            <a:spAutoFit/>
+          </a:bodyPr>
+          <a:lstStyle/>
+          <a:p>
+            <a:pPr algn="ctr"/>
+            <a:r>
+              <a:rPr sz="1000" b="1">
+                <a:solidFill>
+                  <a:srgbClr val="556677"/>
+                </a:solidFill>
+                <a:latin typeface="Calibri"/>
+              </a:rPr>
+              <a:t>Specificity</a:t>
+            </a:r>
+          </a:p>
+        </p:txBody>
+      </p:sp>
+      <p:sp>
+        <p:nvSpPr>
+          <p:cNvPr id="17" name="TextBox 16">
+            <a:extLst>
+              <a:ext uri="{FF2B5EF4-FFF2-40B4-BE49-F238E27FC236}">
+                <a16:creationId xmlns:a16="http://schemas.microsoft.com/office/drawing/2014/main" id="{AB6721ED-2CE9-3E3F-8920-D2DE1B370167}"/>
+              </a:ext>
+            </a:extLst>
+          </p:cNvPr>
+          <p:cNvSpPr txBox="1"/>
+          <p:nvPr/>
+        </p:nvSpPr>
+        <p:spPr>
+          <a:xfrm>
+            <a:off x="3771900" y="1965960"/>
+            <a:ext cx="1234440" cy="502920"/>
+          </a:xfrm>
+          <a:prstGeom prst="rect">
+            <a:avLst/>
+          </a:prstGeom>
+          <a:noFill/>
+        </p:spPr>
+        <p:txBody>
+          <a:bodyPr wrap="square" lIns="36000" tIns="18000" rIns="36000" bIns="18000">
+            <a:spAutoFit/>
+          </a:bodyPr>
+          <a:lstStyle/>
+          <a:p>
+            <a:pPr algn="ctr"/>
+            <a:r>
+              <a:rPr sz="2200" b="1">
+                <a:solidFill>
+                  <a:srgbClr val="1E6C93"/>
+                </a:solidFill>
+                <a:latin typeface="Calibri"/>
+              </a:rPr>
+              <a:t>63.33%</a:t>
+            </a:r>
+          </a:p>
+        </p:txBody>
+      </p:sp>
+      <p:sp>
+        <p:nvSpPr>
+          <p:cNvPr id="18" name="TextBox 17">
+            <a:extLst>
+              <a:ext uri="{FF2B5EF4-FFF2-40B4-BE49-F238E27FC236}">
+                <a16:creationId xmlns:a16="http://schemas.microsoft.com/office/drawing/2014/main" id="{25CEF58C-88E4-15E4-8BCC-51EF67AA652B}"/>
+              </a:ext>
+            </a:extLst>
+          </p:cNvPr>
+          <p:cNvSpPr txBox="1"/>
+          <p:nvPr/>
+        </p:nvSpPr>
+        <p:spPr>
+          <a:xfrm>
+            <a:off x="3771900" y="2514600"/>
+            <a:ext cx="1234440" cy="228600"/>
+          </a:xfrm>
+          <a:prstGeom prst="rect">
+            <a:avLst/>
+          </a:prstGeom>
+          <a:noFill/>
+        </p:spPr>
+        <p:txBody>
+          <a:bodyPr wrap="square" lIns="36000" tIns="18000" rIns="36000" bIns="18000">
+            <a:spAutoFit/>
+          </a:bodyPr>
+          <a:lstStyle/>
+          <a:p>
+            <a:pPr algn="ctr"/>
+            <a:r>
+              <a:rPr sz="900" b="0">
+                <a:solidFill>
+                  <a:srgbClr val="1F2F3F"/>
+                </a:solidFill>
+                <a:latin typeface="Calibri"/>
+              </a:rPr>
+              <a:t>38 / 60</a:t>
+            </a:r>
+          </a:p>
+        </p:txBody>
+      </p:sp>
+      <p:sp>
+        <p:nvSpPr>
+          <p:cNvPr id="19" name="TextBox 18">
+            <a:extLst>
+              <a:ext uri="{FF2B5EF4-FFF2-40B4-BE49-F238E27FC236}">
+                <a16:creationId xmlns:a16="http://schemas.microsoft.com/office/drawing/2014/main" id="{3B85AF2A-18E8-BFF9-6870-48C3D92B6FF4}"/>
+              </a:ext>
+            </a:extLst>
+          </p:cNvPr>
+          <p:cNvSpPr txBox="1"/>
+          <p:nvPr/>
+        </p:nvSpPr>
+        <p:spPr>
+          <a:xfrm>
+            <a:off x="3771900" y="2770632"/>
+            <a:ext cx="1234440" cy="457200"/>
+          </a:xfrm>
+          <a:prstGeom prst="rect">
+            <a:avLst/>
+          </a:prstGeom>
+          <a:noFill/>
+        </p:spPr>
+        <p:txBody>
+          <a:bodyPr wrap="square" lIns="36000" tIns="18000" rIns="36000" bIns="18000">
+            <a:spAutoFit/>
+          </a:bodyPr>
+          <a:lstStyle/>
+          <a:p>
+            <a:pPr algn="ctr"/>
+            <a:r>
+              <a:rPr sz="800" b="0">
+                <a:solidFill>
+                  <a:srgbClr val="556677"/>
+                </a:solidFill>
+                <a:latin typeface="Calibri"/>
+              </a:rPr>
+              <a:t>95% CI 50.7 – 74.4</a:t>
+            </a:r>
+          </a:p>
+        </p:txBody>
+      </p:sp>
+      <p:sp>
+        <p:nvSpPr>
+          <p:cNvPr id="30" name="Rectangle 29">
+            <a:extLst>
+              <a:ext uri="{FF2B5EF4-FFF2-40B4-BE49-F238E27FC236}">
+                <a16:creationId xmlns:a16="http://schemas.microsoft.com/office/drawing/2014/main" id="{A1D89E89-D2C8-4C0A-68C4-622C7795CEE9}"/>
+              </a:ext>
+            </a:extLst>
+          </p:cNvPr>
+          <p:cNvSpPr/>
+          <p:nvPr/>
+        </p:nvSpPr>
+        <p:spPr>
+          <a:xfrm>
+            <a:off x="6080760" y="1207008"/>
+            <a:ext cx="5577840" cy="2240280"/>
+          </a:xfrm>
+          <a:prstGeom prst="rect">
+            <a:avLst/>
+          </a:prstGeom>
+          <a:solidFill>
+            <a:srgbClr val="E8F4F8"/>
+          </a:solidFill>
+          <a:ln>
+            <a:noFill/>
+          </a:ln>
+          <a:effectLst/>
+        </p:spPr>
+        <p:style>
+          <a:lnRef idx="1">
+            <a:schemeClr val="accent1"/>
+          </a:lnRef>
+          <a:fillRef idx="3">
+            <a:schemeClr val="accent1"/>
+          </a:fillRef>
+          <a:effectRef idx="2">
+            <a:schemeClr val="accent1"/>
+          </a:effectRef>
+          <a:fontRef idx="minor">
+            <a:schemeClr val="lt1"/>
+          </a:fontRef>
+        </p:style>
+        <p:txBody>
+          <a:bodyPr rtlCol="0" anchor="ctr"/>
+          <a:lstStyle/>
+          <a:p>
+            <a:pPr algn="ctr"/>
+            <a:endParaRPr/>
+          </a:p>
+        </p:txBody>
+      </p:sp>
+      <p:sp>
+        <p:nvSpPr>
+          <p:cNvPr id="31" name="Rectangle 30">
+            <a:extLst>
+              <a:ext uri="{FF2B5EF4-FFF2-40B4-BE49-F238E27FC236}">
+                <a16:creationId xmlns:a16="http://schemas.microsoft.com/office/drawing/2014/main" id="{E26210AB-BACA-29CE-CFFA-295B33F76BD7}"/>
+              </a:ext>
+            </a:extLst>
+          </p:cNvPr>
+          <p:cNvSpPr/>
+          <p:nvPr/>
+        </p:nvSpPr>
+        <p:spPr>
+          <a:xfrm>
+            <a:off x="6080760" y="1207008"/>
+            <a:ext cx="91440" cy="2240280"/>
+          </a:xfrm>
+          <a:prstGeom prst="rect">
+            <a:avLst/>
+          </a:prstGeom>
+          <a:solidFill>
+            <a:srgbClr val="49AAD4"/>
+          </a:solidFill>
+          <a:ln>
+            <a:noFill/>
+          </a:ln>
+          <a:effectLst/>
+        </p:spPr>
+        <p:style>
+          <a:lnRef idx="1">
+            <a:schemeClr val="accent1"/>
+          </a:lnRef>
+          <a:fillRef idx="3">
+            <a:schemeClr val="accent1"/>
+          </a:fillRef>
+          <a:effectRef idx="2">
+            <a:schemeClr val="accent1"/>
+          </a:effectRef>
+          <a:fontRef idx="minor">
+            <a:schemeClr val="lt1"/>
+          </a:fontRef>
+        </p:style>
+        <p:txBody>
+          <a:bodyPr rtlCol="0" anchor="ctr"/>
+          <a:lstStyle/>
+          <a:p>
+            <a:pPr algn="ctr"/>
+            <a:endParaRPr/>
+          </a:p>
+        </p:txBody>
+      </p:sp>
+      <p:sp>
+        <p:nvSpPr>
+          <p:cNvPr id="32" name="TextBox 31">
+            <a:extLst>
+              <a:ext uri="{FF2B5EF4-FFF2-40B4-BE49-F238E27FC236}">
+                <a16:creationId xmlns:a16="http://schemas.microsoft.com/office/drawing/2014/main" id="{5B7C7E88-B3CB-132E-F185-3689B8956A25}"/>
+              </a:ext>
+            </a:extLst>
+          </p:cNvPr>
+          <p:cNvSpPr txBox="1"/>
+          <p:nvPr/>
+        </p:nvSpPr>
+        <p:spPr>
+          <a:xfrm>
+            <a:off x="6309360" y="1280160"/>
+            <a:ext cx="5349240" cy="274320"/>
+          </a:xfrm>
+          <a:prstGeom prst="rect">
+            <a:avLst/>
+          </a:prstGeom>
+          <a:noFill/>
+        </p:spPr>
+        <p:txBody>
+          <a:bodyPr wrap="square" lIns="36000" tIns="18000" rIns="36000" bIns="18000">
+            <a:spAutoFit/>
+          </a:bodyPr>
+          <a:lstStyle/>
+          <a:p>
+            <a:r>
+              <a:rPr sz="1300" b="1">
+                <a:solidFill>
+                  <a:srgbClr val="1E6C93"/>
+                </a:solidFill>
+                <a:latin typeface="Calibri"/>
+              </a:rPr>
+              <a:t>Defensible Adjusted Views</a:t>
+            </a:r>
+          </a:p>
+        </p:txBody>
+      </p:sp>
+      <p:sp>
+        <p:nvSpPr>
+          <p:cNvPr id="33" name="Rectangle 32">
+            <a:extLst>
+              <a:ext uri="{FF2B5EF4-FFF2-40B4-BE49-F238E27FC236}">
+                <a16:creationId xmlns:a16="http://schemas.microsoft.com/office/drawing/2014/main" id="{DA51060F-60B1-E570-190C-207D66616BE6}"/>
+              </a:ext>
+            </a:extLst>
+          </p:cNvPr>
+          <p:cNvSpPr/>
+          <p:nvPr/>
+        </p:nvSpPr>
+        <p:spPr>
+          <a:xfrm>
+            <a:off x="6263640" y="1627632"/>
+            <a:ext cx="5212080" cy="292608"/>
+          </a:xfrm>
+          <a:prstGeom prst="rect">
+            <a:avLst/>
+          </a:prstGeom>
+          <a:solidFill>
+            <a:srgbClr val="1E6C93"/>
+          </a:solidFill>
+          <a:ln>
+            <a:noFill/>
+          </a:ln>
+          <a:effectLst/>
+        </p:spPr>
+        <p:style>
+          <a:lnRef idx="1">
+            <a:schemeClr val="accent1"/>
+          </a:lnRef>
+          <a:fillRef idx="3">
+            <a:schemeClr val="accent1"/>
+          </a:fillRef>
+          <a:effectRef idx="2">
+            <a:schemeClr val="accent1"/>
+          </a:effectRef>
+          <a:fontRef idx="minor">
+            <a:schemeClr val="lt1"/>
+          </a:fontRef>
+        </p:style>
+        <p:txBody>
+          <a:bodyPr rtlCol="0" anchor="ctr"/>
+          <a:lstStyle/>
+          <a:p>
+            <a:pPr algn="ctr"/>
+            <a:endParaRPr/>
+          </a:p>
+        </p:txBody>
+      </p:sp>
+      <p:sp>
+        <p:nvSpPr>
+          <p:cNvPr id="34" name="TextBox 33">
+            <a:extLst>
+              <a:ext uri="{FF2B5EF4-FFF2-40B4-BE49-F238E27FC236}">
+                <a16:creationId xmlns:a16="http://schemas.microsoft.com/office/drawing/2014/main" id="{6623B4F4-8A02-3672-6D15-CEA5419B64EC}"/>
+              </a:ext>
+            </a:extLst>
+          </p:cNvPr>
+          <p:cNvSpPr txBox="1"/>
+          <p:nvPr/>
+        </p:nvSpPr>
+        <p:spPr>
+          <a:xfrm>
+            <a:off x="6355080" y="1664208"/>
+            <a:ext cx="3474720" cy="228600"/>
+          </a:xfrm>
+          <a:prstGeom prst="rect">
+            <a:avLst/>
+          </a:prstGeom>
+          <a:noFill/>
+        </p:spPr>
+        <p:txBody>
+          <a:bodyPr wrap="square" lIns="36000" tIns="18000" rIns="36000" bIns="18000">
+            <a:spAutoFit/>
+          </a:bodyPr>
+          <a:lstStyle/>
+          <a:p>
+            <a:r>
+              <a:rPr sz="1000" b="1">
+                <a:solidFill>
+                  <a:srgbClr val="FFFFFF"/>
+                </a:solidFill>
+                <a:latin typeface="Calibri"/>
+              </a:rPr>
+              <a:t>Scenario</a:t>
+            </a:r>
+          </a:p>
+        </p:txBody>
+      </p:sp>
+      <p:sp>
+        <p:nvSpPr>
+          <p:cNvPr id="35" name="TextBox 34">
+            <a:extLst>
+              <a:ext uri="{FF2B5EF4-FFF2-40B4-BE49-F238E27FC236}">
+                <a16:creationId xmlns:a16="http://schemas.microsoft.com/office/drawing/2014/main" id="{0E3982A2-C949-E0CE-188C-B6C9190E10BA}"/>
+              </a:ext>
+            </a:extLst>
+          </p:cNvPr>
+          <p:cNvSpPr txBox="1"/>
+          <p:nvPr/>
+        </p:nvSpPr>
+        <p:spPr>
+          <a:xfrm>
+            <a:off x="9738360" y="1664208"/>
+            <a:ext cx="868680" cy="228600"/>
+          </a:xfrm>
+          <a:prstGeom prst="rect">
+            <a:avLst/>
+          </a:prstGeom>
+          <a:noFill/>
+        </p:spPr>
+        <p:txBody>
+          <a:bodyPr wrap="square" lIns="36000" tIns="18000" rIns="36000" bIns="18000">
+            <a:spAutoFit/>
+          </a:bodyPr>
+          <a:lstStyle/>
+          <a:p>
+            <a:pPr algn="ctr"/>
+            <a:r>
+              <a:rPr sz="1000" b="1">
+                <a:solidFill>
+                  <a:srgbClr val="FFFFFF"/>
+                </a:solidFill>
+                <a:latin typeface="Calibri"/>
+              </a:rPr>
+              <a:t>Sens</a:t>
+            </a:r>
+          </a:p>
+        </p:txBody>
+      </p:sp>
+      <p:sp>
+        <p:nvSpPr>
+          <p:cNvPr id="36" name="TextBox 35">
+            <a:extLst>
+              <a:ext uri="{FF2B5EF4-FFF2-40B4-BE49-F238E27FC236}">
+                <a16:creationId xmlns:a16="http://schemas.microsoft.com/office/drawing/2014/main" id="{50D2B699-8FE6-57DA-FFC4-840D6C595690}"/>
+              </a:ext>
+            </a:extLst>
+          </p:cNvPr>
+          <p:cNvSpPr txBox="1"/>
+          <p:nvPr/>
+        </p:nvSpPr>
+        <p:spPr>
+          <a:xfrm>
+            <a:off x="10607040" y="1664208"/>
+            <a:ext cx="868680" cy="228600"/>
+          </a:xfrm>
+          <a:prstGeom prst="rect">
+            <a:avLst/>
+          </a:prstGeom>
+          <a:noFill/>
+        </p:spPr>
+        <p:txBody>
+          <a:bodyPr wrap="square" lIns="36000" tIns="18000" rIns="36000" bIns="18000">
+            <a:spAutoFit/>
+          </a:bodyPr>
+          <a:lstStyle/>
+          <a:p>
+            <a:pPr algn="ctr"/>
+            <a:r>
+              <a:rPr sz="1000" b="1">
+                <a:solidFill>
+                  <a:srgbClr val="FFFFFF"/>
+                </a:solidFill>
+                <a:latin typeface="Calibri"/>
+              </a:rPr>
+              <a:t>Spec</a:t>
+            </a:r>
+          </a:p>
+        </p:txBody>
+      </p:sp>
+      <p:sp>
+        <p:nvSpPr>
+          <p:cNvPr id="37" name="Rectangle 36">
+            <a:extLst>
+              <a:ext uri="{FF2B5EF4-FFF2-40B4-BE49-F238E27FC236}">
+                <a16:creationId xmlns:a16="http://schemas.microsoft.com/office/drawing/2014/main" id="{DB5652EC-4066-41E5-1962-2A3A89EE1A55}"/>
+              </a:ext>
+            </a:extLst>
+          </p:cNvPr>
+          <p:cNvSpPr/>
+          <p:nvPr/>
+        </p:nvSpPr>
+        <p:spPr>
+          <a:xfrm>
+            <a:off x="6263640" y="1920240"/>
+            <a:ext cx="5212080" cy="393192"/>
+          </a:xfrm>
+          <a:prstGeom prst="rect">
+            <a:avLst/>
+          </a:prstGeom>
+          <a:solidFill>
+            <a:srgbClr val="FFFFFF"/>
+          </a:solidFill>
+          <a:ln>
+            <a:noFill/>
+          </a:ln>
+          <a:effectLst/>
+        </p:spPr>
+        <p:style>
+          <a:lnRef idx="1">
+            <a:schemeClr val="accent1"/>
+          </a:lnRef>
+          <a:fillRef idx="3">
+            <a:schemeClr val="accent1"/>
+          </a:fillRef>
+          <a:effectRef idx="2">
+            <a:schemeClr val="accent1"/>
+          </a:effectRef>
+          <a:fontRef idx="minor">
+            <a:schemeClr val="lt1"/>
+          </a:fontRef>
+        </p:style>
+        <p:txBody>
+          <a:bodyPr rtlCol="0" anchor="ctr"/>
+          <a:lstStyle/>
+          <a:p>
+            <a:pPr algn="ctr"/>
+            <a:endParaRPr/>
+          </a:p>
+        </p:txBody>
+      </p:sp>
+      <p:sp>
+        <p:nvSpPr>
+          <p:cNvPr id="38" name="TextBox 37">
+            <a:extLst>
+              <a:ext uri="{FF2B5EF4-FFF2-40B4-BE49-F238E27FC236}">
+                <a16:creationId xmlns:a16="http://schemas.microsoft.com/office/drawing/2014/main" id="{0D556E89-9F3C-23B8-0EF9-7172574E8A72}"/>
+              </a:ext>
+            </a:extLst>
+          </p:cNvPr>
+          <p:cNvSpPr txBox="1"/>
+          <p:nvPr/>
+        </p:nvSpPr>
+        <p:spPr>
+          <a:xfrm>
+            <a:off x="6355080" y="1975104"/>
+            <a:ext cx="3474720" cy="301751"/>
+          </a:xfrm>
+          <a:prstGeom prst="rect">
+            <a:avLst/>
+          </a:prstGeom>
+          <a:noFill/>
+        </p:spPr>
+        <p:txBody>
+          <a:bodyPr wrap="square" lIns="36000" tIns="18000" rIns="36000" bIns="18000">
+            <a:spAutoFit/>
+          </a:bodyPr>
+          <a:lstStyle/>
+          <a:p>
+            <a:r>
+              <a:rPr sz="1000" b="0">
+                <a:solidFill>
+                  <a:srgbClr val="1F2F3F"/>
+                </a:solidFill>
+                <a:latin typeface="Calibri"/>
+              </a:rPr>
+              <a:t>Audit baseline (no adjustment)</a:t>
+            </a:r>
+          </a:p>
+        </p:txBody>
+      </p:sp>
+      <p:sp>
+        <p:nvSpPr>
+          <p:cNvPr id="39" name="TextBox 38">
+            <a:extLst>
+              <a:ext uri="{FF2B5EF4-FFF2-40B4-BE49-F238E27FC236}">
+                <a16:creationId xmlns:a16="http://schemas.microsoft.com/office/drawing/2014/main" id="{422CE601-168C-754A-9EAF-9DB559B92772}"/>
+              </a:ext>
+            </a:extLst>
+          </p:cNvPr>
+          <p:cNvSpPr txBox="1"/>
+          <p:nvPr/>
+        </p:nvSpPr>
+        <p:spPr>
+          <a:xfrm>
+            <a:off x="9738360" y="1975104"/>
+            <a:ext cx="868680" cy="301751"/>
+          </a:xfrm>
+          <a:prstGeom prst="rect">
+            <a:avLst/>
+          </a:prstGeom>
+          <a:noFill/>
+        </p:spPr>
+        <p:txBody>
+          <a:bodyPr wrap="square" lIns="36000" tIns="18000" rIns="36000" bIns="18000">
+            <a:spAutoFit/>
+          </a:bodyPr>
+          <a:lstStyle/>
+          <a:p>
+            <a:pPr algn="ctr"/>
+            <a:r>
+              <a:rPr sz="1100" b="1">
+                <a:solidFill>
+                  <a:srgbClr val="1F2F3F"/>
+                </a:solidFill>
+                <a:latin typeface="Calibri"/>
+              </a:rPr>
+              <a:t>73.3%</a:t>
+            </a:r>
+          </a:p>
+        </p:txBody>
+      </p:sp>
+      <p:sp>
+        <p:nvSpPr>
+          <p:cNvPr id="40" name="TextBox 39">
+            <a:extLst>
+              <a:ext uri="{FF2B5EF4-FFF2-40B4-BE49-F238E27FC236}">
+                <a16:creationId xmlns:a16="http://schemas.microsoft.com/office/drawing/2014/main" id="{11AC8AE4-CA99-81CB-4E84-AC1EDE676FF4}"/>
+              </a:ext>
+            </a:extLst>
+          </p:cNvPr>
+          <p:cNvSpPr txBox="1"/>
+          <p:nvPr/>
+        </p:nvSpPr>
+        <p:spPr>
+          <a:xfrm>
+            <a:off x="10607040" y="1975104"/>
+            <a:ext cx="868680" cy="301751"/>
+          </a:xfrm>
+          <a:prstGeom prst="rect">
+            <a:avLst/>
+          </a:prstGeom>
+          <a:noFill/>
+        </p:spPr>
+        <p:txBody>
+          <a:bodyPr wrap="square" lIns="36000" tIns="18000" rIns="36000" bIns="18000">
+            <a:spAutoFit/>
+          </a:bodyPr>
+          <a:lstStyle/>
+          <a:p>
+            <a:pPr algn="ctr"/>
+            <a:r>
+              <a:rPr sz="1100" b="1">
+                <a:solidFill>
+                  <a:srgbClr val="1F2F3F"/>
+                </a:solidFill>
+                <a:latin typeface="Calibri"/>
+              </a:rPr>
+              <a:t>63.3%</a:t>
+            </a:r>
+          </a:p>
+        </p:txBody>
+      </p:sp>
+      <p:sp>
+        <p:nvSpPr>
+          <p:cNvPr id="41" name="Rectangle 40">
+            <a:extLst>
+              <a:ext uri="{FF2B5EF4-FFF2-40B4-BE49-F238E27FC236}">
+                <a16:creationId xmlns:a16="http://schemas.microsoft.com/office/drawing/2014/main" id="{817193F9-0D1C-9567-F34C-F5DCEAF6EBAD}"/>
+              </a:ext>
+            </a:extLst>
+          </p:cNvPr>
+          <p:cNvSpPr/>
+          <p:nvPr/>
+        </p:nvSpPr>
+        <p:spPr>
+          <a:xfrm>
+            <a:off x="6263640" y="2313432"/>
+            <a:ext cx="5212080" cy="393192"/>
+          </a:xfrm>
+          <a:prstGeom prst="rect">
+            <a:avLst/>
+          </a:prstGeom>
+          <a:solidFill>
+            <a:srgbClr val="E8F4F8"/>
+          </a:solidFill>
+          <a:ln>
+            <a:noFill/>
+          </a:ln>
+          <a:effectLst/>
+        </p:spPr>
+        <p:style>
+          <a:lnRef idx="1">
+            <a:schemeClr val="accent1"/>
+          </a:lnRef>
+          <a:fillRef idx="3">
+            <a:schemeClr val="accent1"/>
+          </a:fillRef>
+          <a:effectRef idx="2">
+            <a:schemeClr val="accent1"/>
+          </a:effectRef>
+          <a:fontRef idx="minor">
+            <a:schemeClr val="lt1"/>
+          </a:fontRef>
+        </p:style>
+        <p:txBody>
+          <a:bodyPr rtlCol="0" anchor="ctr"/>
+          <a:lstStyle/>
+          <a:p>
+            <a:pPr algn="ctr"/>
+            <a:endParaRPr/>
+          </a:p>
+        </p:txBody>
+      </p:sp>
+      <p:sp>
+        <p:nvSpPr>
+          <p:cNvPr id="42" name="TextBox 41">
+            <a:extLst>
+              <a:ext uri="{FF2B5EF4-FFF2-40B4-BE49-F238E27FC236}">
+                <a16:creationId xmlns:a16="http://schemas.microsoft.com/office/drawing/2014/main" id="{1050F3D4-4206-B251-C85F-28B3420401A7}"/>
+              </a:ext>
+            </a:extLst>
+          </p:cNvPr>
+          <p:cNvSpPr txBox="1"/>
+          <p:nvPr/>
+        </p:nvSpPr>
+        <p:spPr>
+          <a:xfrm>
+            <a:off x="6355080" y="2368296"/>
+            <a:ext cx="3474720" cy="301751"/>
+          </a:xfrm>
+          <a:prstGeom prst="rect">
+            <a:avLst/>
+          </a:prstGeom>
+          <a:noFill/>
+        </p:spPr>
+        <p:txBody>
+          <a:bodyPr wrap="square" lIns="36000" tIns="18000" rIns="36000" bIns="18000">
+            <a:spAutoFit/>
+          </a:bodyPr>
+          <a:lstStyle/>
+          <a:p>
+            <a:r>
+              <a:rPr sz="1000" b="0">
+                <a:solidFill>
+                  <a:srgbClr val="1F2F3F"/>
+                </a:solidFill>
+                <a:latin typeface="Calibri"/>
+              </a:rPr>
+              <a:t>Excluding 5 neonates (out-of-scope)</a:t>
+            </a:r>
+          </a:p>
+        </p:txBody>
+      </p:sp>
+      <p:sp>
+        <p:nvSpPr>
+          <p:cNvPr id="43" name="TextBox 42">
+            <a:extLst>
+              <a:ext uri="{FF2B5EF4-FFF2-40B4-BE49-F238E27FC236}">
+                <a16:creationId xmlns:a16="http://schemas.microsoft.com/office/drawing/2014/main" id="{46FF14CC-CD8B-4CDF-0DDB-349AA4F969E0}"/>
+              </a:ext>
+            </a:extLst>
+          </p:cNvPr>
+          <p:cNvSpPr txBox="1"/>
+          <p:nvPr/>
+        </p:nvSpPr>
+        <p:spPr>
+          <a:xfrm>
+            <a:off x="9738360" y="2368296"/>
+            <a:ext cx="868680" cy="301751"/>
+          </a:xfrm>
+          <a:prstGeom prst="rect">
+            <a:avLst/>
+          </a:prstGeom>
+          <a:noFill/>
+        </p:spPr>
+        <p:txBody>
+          <a:bodyPr wrap="square" lIns="36000" tIns="18000" rIns="36000" bIns="18000">
+            <a:spAutoFit/>
+          </a:bodyPr>
+          <a:lstStyle/>
+          <a:p>
+            <a:pPr algn="ctr"/>
+            <a:r>
+              <a:rPr sz="1100" b="1">
+                <a:solidFill>
+                  <a:srgbClr val="1F2F3F"/>
+                </a:solidFill>
+                <a:latin typeface="Calibri"/>
+              </a:rPr>
+              <a:t>75.9%</a:t>
+            </a:r>
+          </a:p>
+        </p:txBody>
+      </p:sp>
+      <p:sp>
+        <p:nvSpPr>
+          <p:cNvPr id="44" name="TextBox 43">
+            <a:extLst>
+              <a:ext uri="{FF2B5EF4-FFF2-40B4-BE49-F238E27FC236}">
+                <a16:creationId xmlns:a16="http://schemas.microsoft.com/office/drawing/2014/main" id="{83184291-6762-3768-32F1-6FC72CC1447D}"/>
+              </a:ext>
+            </a:extLst>
+          </p:cNvPr>
+          <p:cNvSpPr txBox="1"/>
+          <p:nvPr/>
+        </p:nvSpPr>
+        <p:spPr>
+          <a:xfrm>
+            <a:off x="10607040" y="2368296"/>
+            <a:ext cx="868680" cy="301751"/>
+          </a:xfrm>
+          <a:prstGeom prst="rect">
+            <a:avLst/>
+          </a:prstGeom>
+          <a:noFill/>
+        </p:spPr>
+        <p:txBody>
+          <a:bodyPr wrap="square" lIns="36000" tIns="18000" rIns="36000" bIns="18000">
+            <a:spAutoFit/>
+          </a:bodyPr>
+          <a:lstStyle/>
+          <a:p>
+            <a:pPr algn="ctr"/>
+            <a:r>
+              <a:rPr sz="1100" b="1">
+                <a:solidFill>
+                  <a:srgbClr val="1F2F3F"/>
+                </a:solidFill>
+                <a:latin typeface="Calibri"/>
+              </a:rPr>
+              <a:t>64.3%</a:t>
+            </a:r>
+          </a:p>
+        </p:txBody>
+      </p:sp>
+      <p:sp>
+        <p:nvSpPr>
+          <p:cNvPr id="45" name="Rectangle 44">
+            <a:extLst>
+              <a:ext uri="{FF2B5EF4-FFF2-40B4-BE49-F238E27FC236}">
+                <a16:creationId xmlns:a16="http://schemas.microsoft.com/office/drawing/2014/main" id="{EE5CC5B9-B7AD-A288-2802-B6D0C9F595C3}"/>
+              </a:ext>
+            </a:extLst>
+          </p:cNvPr>
+          <p:cNvSpPr/>
+          <p:nvPr/>
+        </p:nvSpPr>
+        <p:spPr>
+          <a:xfrm>
+            <a:off x="6263640" y="2706624"/>
+            <a:ext cx="5212080" cy="393192"/>
+          </a:xfrm>
+          <a:prstGeom prst="rect">
+            <a:avLst/>
+          </a:prstGeom>
+          <a:solidFill>
+            <a:srgbClr val="FFFFFF"/>
+          </a:solidFill>
+          <a:ln>
+            <a:noFill/>
+          </a:ln>
+          <a:effectLst/>
+        </p:spPr>
+        <p:style>
+          <a:lnRef idx="1">
+            <a:schemeClr val="accent1"/>
+          </a:lnRef>
+          <a:fillRef idx="3">
+            <a:schemeClr val="accent1"/>
+          </a:fillRef>
+          <a:effectRef idx="2">
+            <a:schemeClr val="accent1"/>
+          </a:effectRef>
+          <a:fontRef idx="minor">
+            <a:schemeClr val="lt1"/>
+          </a:fontRef>
+        </p:style>
+        <p:txBody>
+          <a:bodyPr rtlCol="0" anchor="ctr"/>
+          <a:lstStyle/>
+          <a:p>
+            <a:pPr algn="ctr"/>
+            <a:endParaRPr/>
+          </a:p>
+        </p:txBody>
+      </p:sp>
+      <p:sp>
+        <p:nvSpPr>
+          <p:cNvPr id="46" name="TextBox 45">
+            <a:extLst>
+              <a:ext uri="{FF2B5EF4-FFF2-40B4-BE49-F238E27FC236}">
+                <a16:creationId xmlns:a16="http://schemas.microsoft.com/office/drawing/2014/main" id="{00D25D44-E424-E4C2-6014-B7140F16D3ED}"/>
+              </a:ext>
+            </a:extLst>
+          </p:cNvPr>
+          <p:cNvSpPr txBox="1"/>
+          <p:nvPr/>
+        </p:nvSpPr>
+        <p:spPr>
+          <a:xfrm>
+            <a:off x="6355080" y="2761488"/>
+            <a:ext cx="3474720" cy="301751"/>
+          </a:xfrm>
+          <a:prstGeom prst="rect">
+            <a:avLst/>
+          </a:prstGeom>
+          <a:noFill/>
+        </p:spPr>
+        <p:txBody>
+          <a:bodyPr wrap="square" lIns="36000" tIns="18000" rIns="36000" bIns="18000">
+            <a:spAutoFit/>
+          </a:bodyPr>
+          <a:lstStyle/>
+          <a:p>
+            <a:r>
+              <a:rPr sz="1000" b="0">
+                <a:solidFill>
+                  <a:srgbClr val="1F2F3F"/>
+                </a:solidFill>
+                <a:latin typeface="Calibri"/>
+              </a:rPr>
+              <a:t>+ Reclassify 5 hidden-TP FPs as justifiable</a:t>
+            </a:r>
+          </a:p>
+        </p:txBody>
+      </p:sp>
+      <p:sp>
+        <p:nvSpPr>
+          <p:cNvPr id="47" name="TextBox 46">
+            <a:extLst>
+              <a:ext uri="{FF2B5EF4-FFF2-40B4-BE49-F238E27FC236}">
+                <a16:creationId xmlns:a16="http://schemas.microsoft.com/office/drawing/2014/main" id="{30AA30D5-0101-8B5E-09F8-9CFE342F94B6}"/>
+              </a:ext>
+            </a:extLst>
+          </p:cNvPr>
+          <p:cNvSpPr txBox="1"/>
+          <p:nvPr/>
+        </p:nvSpPr>
+        <p:spPr>
+          <a:xfrm>
+            <a:off x="9738360" y="2761488"/>
+            <a:ext cx="868680" cy="301751"/>
+          </a:xfrm>
+          <a:prstGeom prst="rect">
+            <a:avLst/>
+          </a:prstGeom>
+          <a:noFill/>
+        </p:spPr>
+        <p:txBody>
+          <a:bodyPr wrap="square" lIns="36000" tIns="18000" rIns="36000" bIns="18000">
+            <a:spAutoFit/>
+          </a:bodyPr>
+          <a:lstStyle/>
+          <a:p>
+            <a:pPr algn="ctr"/>
+            <a:r>
+              <a:rPr sz="1100" b="1">
+                <a:solidFill>
+                  <a:srgbClr val="1F2F3F"/>
+                </a:solidFill>
+                <a:latin typeface="Calibri"/>
+              </a:rPr>
+              <a:t>~76%</a:t>
+            </a:r>
+          </a:p>
+        </p:txBody>
+      </p:sp>
+      <p:sp>
+        <p:nvSpPr>
+          <p:cNvPr id="48" name="TextBox 47">
+            <a:extLst>
+              <a:ext uri="{FF2B5EF4-FFF2-40B4-BE49-F238E27FC236}">
+                <a16:creationId xmlns:a16="http://schemas.microsoft.com/office/drawing/2014/main" id="{7BB7B707-20CF-B559-AC2F-EFA3AE08E821}"/>
+              </a:ext>
+            </a:extLst>
+          </p:cNvPr>
+          <p:cNvSpPr txBox="1"/>
+          <p:nvPr/>
+        </p:nvSpPr>
+        <p:spPr>
+          <a:xfrm>
+            <a:off x="10607040" y="2761488"/>
+            <a:ext cx="868680" cy="301751"/>
+          </a:xfrm>
+          <a:prstGeom prst="rect">
+            <a:avLst/>
+          </a:prstGeom>
+          <a:noFill/>
+        </p:spPr>
+        <p:txBody>
+          <a:bodyPr wrap="square" lIns="36000" tIns="18000" rIns="36000" bIns="18000">
+            <a:spAutoFit/>
+          </a:bodyPr>
+          <a:lstStyle/>
+          <a:p>
+            <a:pPr algn="ctr"/>
+            <a:r>
+              <a:rPr sz="1100" b="1">
+                <a:solidFill>
+                  <a:srgbClr val="1F2F3F"/>
+                </a:solidFill>
+                <a:latin typeface="Calibri"/>
+              </a:rPr>
+              <a:t>~73%</a:t>
+            </a:r>
+          </a:p>
+        </p:txBody>
+      </p:sp>
+      <p:sp>
+        <p:nvSpPr>
+          <p:cNvPr id="49" name="Rectangle 48">
+            <a:extLst>
+              <a:ext uri="{FF2B5EF4-FFF2-40B4-BE49-F238E27FC236}">
+                <a16:creationId xmlns:a16="http://schemas.microsoft.com/office/drawing/2014/main" id="{C61D05D8-4DAF-68CD-B3D8-8026220D6C25}"/>
+              </a:ext>
+            </a:extLst>
+          </p:cNvPr>
+          <p:cNvSpPr/>
+          <p:nvPr/>
+        </p:nvSpPr>
+        <p:spPr>
+          <a:xfrm>
+            <a:off x="6263640" y="3099816"/>
+            <a:ext cx="5212080" cy="393192"/>
+          </a:xfrm>
+          <a:prstGeom prst="rect">
+            <a:avLst/>
+          </a:prstGeom>
+          <a:solidFill>
+            <a:srgbClr val="E8F4F8"/>
+          </a:solidFill>
+          <a:ln>
+            <a:noFill/>
+          </a:ln>
+          <a:effectLst/>
+        </p:spPr>
+        <p:style>
+          <a:lnRef idx="1">
+            <a:schemeClr val="accent1"/>
+          </a:lnRef>
+          <a:fillRef idx="3">
+            <a:schemeClr val="accent1"/>
+          </a:fillRef>
+          <a:effectRef idx="2">
+            <a:schemeClr val="accent1"/>
+          </a:effectRef>
+          <a:fontRef idx="minor">
+            <a:schemeClr val="lt1"/>
+          </a:fontRef>
+        </p:style>
+        <p:txBody>
+          <a:bodyPr rtlCol="0" anchor="ctr"/>
+          <a:lstStyle/>
+          <a:p>
+            <a:pPr algn="ctr"/>
+            <a:endParaRPr/>
+          </a:p>
+        </p:txBody>
+      </p:sp>
+      <p:sp>
+        <p:nvSpPr>
+          <p:cNvPr id="50" name="TextBox 49">
+            <a:extLst>
+              <a:ext uri="{FF2B5EF4-FFF2-40B4-BE49-F238E27FC236}">
+                <a16:creationId xmlns:a16="http://schemas.microsoft.com/office/drawing/2014/main" id="{6944090E-FAA3-7CA8-C517-B2C96440D420}"/>
+              </a:ext>
+            </a:extLst>
+          </p:cNvPr>
+          <p:cNvSpPr txBox="1"/>
+          <p:nvPr/>
+        </p:nvSpPr>
+        <p:spPr>
+          <a:xfrm>
+            <a:off x="6355080" y="3154680"/>
+            <a:ext cx="3474720" cy="301751"/>
+          </a:xfrm>
+          <a:prstGeom prst="rect">
+            <a:avLst/>
+          </a:prstGeom>
+          <a:noFill/>
+        </p:spPr>
+        <p:txBody>
+          <a:bodyPr wrap="square" lIns="36000" tIns="18000" rIns="36000" bIns="18000">
+            <a:spAutoFit/>
+          </a:bodyPr>
+          <a:lstStyle/>
+          <a:p>
+            <a:r>
+              <a:rPr sz="1000" b="1">
+                <a:solidFill>
+                  <a:srgbClr val="1F2F3F"/>
+                </a:solidFill>
+                <a:latin typeface="Calibri"/>
+              </a:rPr>
+              <a:t>Production projection (BP/Lactate available)</a:t>
+            </a:r>
+          </a:p>
+        </p:txBody>
+      </p:sp>
+      <p:sp>
+        <p:nvSpPr>
+          <p:cNvPr id="51" name="TextBox 50">
+            <a:extLst>
+              <a:ext uri="{FF2B5EF4-FFF2-40B4-BE49-F238E27FC236}">
+                <a16:creationId xmlns:a16="http://schemas.microsoft.com/office/drawing/2014/main" id="{1551D4E2-CD38-5C0A-6D29-6CA7345E8527}"/>
+              </a:ext>
+            </a:extLst>
+          </p:cNvPr>
+          <p:cNvSpPr txBox="1"/>
+          <p:nvPr/>
+        </p:nvSpPr>
+        <p:spPr>
+          <a:xfrm>
+            <a:off x="9738360" y="3154680"/>
+            <a:ext cx="868680" cy="301751"/>
+          </a:xfrm>
+          <a:prstGeom prst="rect">
+            <a:avLst/>
+          </a:prstGeom>
+          <a:noFill/>
+        </p:spPr>
+        <p:txBody>
+          <a:bodyPr wrap="square" lIns="36000" tIns="18000" rIns="36000" bIns="18000">
+            <a:spAutoFit/>
+          </a:bodyPr>
+          <a:lstStyle/>
+          <a:p>
+            <a:pPr algn="ctr"/>
+            <a:r>
+              <a:rPr sz="1100" b="1">
+                <a:solidFill>
+                  <a:srgbClr val="2E7D32"/>
+                </a:solidFill>
+                <a:latin typeface="Calibri"/>
+              </a:rPr>
+              <a:t>85-90%</a:t>
+            </a:r>
+          </a:p>
+        </p:txBody>
+      </p:sp>
+      <p:sp>
+        <p:nvSpPr>
+          <p:cNvPr id="52" name="TextBox 51">
+            <a:extLst>
+              <a:ext uri="{FF2B5EF4-FFF2-40B4-BE49-F238E27FC236}">
+                <a16:creationId xmlns:a16="http://schemas.microsoft.com/office/drawing/2014/main" id="{A2CE11D3-1187-EF25-E0BA-405D7E180CA7}"/>
+              </a:ext>
+            </a:extLst>
+          </p:cNvPr>
+          <p:cNvSpPr txBox="1"/>
+          <p:nvPr/>
+        </p:nvSpPr>
+        <p:spPr>
+          <a:xfrm>
+            <a:off x="10607040" y="3154680"/>
+            <a:ext cx="868680" cy="301751"/>
+          </a:xfrm>
+          <a:prstGeom prst="rect">
+            <a:avLst/>
+          </a:prstGeom>
+          <a:noFill/>
+        </p:spPr>
+        <p:txBody>
+          <a:bodyPr wrap="square" lIns="36000" tIns="18000" rIns="36000" bIns="18000">
+            <a:spAutoFit/>
+          </a:bodyPr>
+          <a:lstStyle/>
+          <a:p>
+            <a:pPr algn="ctr"/>
+            <a:r>
+              <a:rPr sz="1100" b="1">
+                <a:solidFill>
+                  <a:srgbClr val="2E7D32"/>
+                </a:solidFill>
+                <a:latin typeface="Calibri"/>
+              </a:rPr>
+              <a:t>70-75%</a:t>
+            </a:r>
+          </a:p>
+        </p:txBody>
+      </p:sp>
+      <p:sp>
+        <p:nvSpPr>
+          <p:cNvPr id="53" name="Rectangle 52">
+            <a:extLst>
+              <a:ext uri="{FF2B5EF4-FFF2-40B4-BE49-F238E27FC236}">
+                <a16:creationId xmlns:a16="http://schemas.microsoft.com/office/drawing/2014/main" id="{DBFE7C8A-892F-2BB2-AA5F-24D0931500D3}"/>
+              </a:ext>
+            </a:extLst>
+          </p:cNvPr>
+          <p:cNvSpPr/>
+          <p:nvPr/>
+        </p:nvSpPr>
+        <p:spPr>
+          <a:xfrm>
+            <a:off x="548640" y="3584448"/>
+            <a:ext cx="3657600" cy="2834640"/>
+          </a:xfrm>
+          <a:prstGeom prst="rect">
+            <a:avLst/>
+          </a:prstGeom>
+          <a:solidFill>
+            <a:srgbClr val="E8F4F8"/>
+          </a:solidFill>
+          <a:ln>
+            <a:noFill/>
+          </a:ln>
+          <a:effectLst/>
+        </p:spPr>
+        <p:style>
+          <a:lnRef idx="1">
+            <a:schemeClr val="accent1"/>
+          </a:lnRef>
+          <a:fillRef idx="3">
+            <a:schemeClr val="accent1"/>
+          </a:fillRef>
+          <a:effectRef idx="2">
+            <a:schemeClr val="accent1"/>
+          </a:effectRef>
+          <a:fontRef idx="minor">
+            <a:schemeClr val="lt1"/>
+          </a:fontRef>
+        </p:style>
+        <p:txBody>
+          <a:bodyPr rtlCol="0" anchor="ctr"/>
+          <a:lstStyle/>
+          <a:p>
+            <a:pPr algn="ctr"/>
+            <a:endParaRPr/>
+          </a:p>
+        </p:txBody>
+      </p:sp>
+      <p:sp>
+        <p:nvSpPr>
+          <p:cNvPr id="54" name="Rectangle 53">
+            <a:extLst>
+              <a:ext uri="{FF2B5EF4-FFF2-40B4-BE49-F238E27FC236}">
+                <a16:creationId xmlns:a16="http://schemas.microsoft.com/office/drawing/2014/main" id="{67E262FC-3D4F-67EF-4266-F15693455EA8}"/>
+              </a:ext>
+            </a:extLst>
+          </p:cNvPr>
+          <p:cNvSpPr/>
+          <p:nvPr/>
+        </p:nvSpPr>
+        <p:spPr>
+          <a:xfrm>
+            <a:off x="548640" y="3584448"/>
+            <a:ext cx="91440" cy="2834640"/>
+          </a:xfrm>
+          <a:prstGeom prst="rect">
+            <a:avLst/>
+          </a:prstGeom>
+          <a:solidFill>
+            <a:srgbClr val="C62828"/>
+          </a:solidFill>
+          <a:ln>
+            <a:noFill/>
+          </a:ln>
+          <a:effectLst/>
+        </p:spPr>
+        <p:style>
+          <a:lnRef idx="1">
+            <a:schemeClr val="accent1"/>
+          </a:lnRef>
+          <a:fillRef idx="3">
+            <a:schemeClr val="accent1"/>
+          </a:fillRef>
+          <a:effectRef idx="2">
+            <a:schemeClr val="accent1"/>
+          </a:effectRef>
+          <a:fontRef idx="minor">
+            <a:schemeClr val="lt1"/>
+          </a:fontRef>
+        </p:style>
+        <p:txBody>
+          <a:bodyPr rtlCol="0" anchor="ctr"/>
+          <a:lstStyle/>
+          <a:p>
+            <a:pPr algn="ctr"/>
+            <a:endParaRPr/>
+          </a:p>
+        </p:txBody>
+      </p:sp>
+      <p:sp>
+        <p:nvSpPr>
+          <p:cNvPr id="55" name="TextBox 54">
+            <a:extLst>
+              <a:ext uri="{FF2B5EF4-FFF2-40B4-BE49-F238E27FC236}">
+                <a16:creationId xmlns:a16="http://schemas.microsoft.com/office/drawing/2014/main" id="{188CA43D-AA0D-DD37-6790-A5F67136F49D}"/>
+              </a:ext>
+            </a:extLst>
+          </p:cNvPr>
+          <p:cNvSpPr txBox="1"/>
+          <p:nvPr/>
+        </p:nvSpPr>
+        <p:spPr>
+          <a:xfrm>
+            <a:off x="731520" y="3657600"/>
+            <a:ext cx="3383280" cy="274320"/>
+          </a:xfrm>
+          <a:prstGeom prst="rect">
+            <a:avLst/>
+          </a:prstGeom>
+          <a:noFill/>
+        </p:spPr>
+        <p:txBody>
+          <a:bodyPr wrap="square" lIns="36000" tIns="18000" rIns="36000" bIns="18000">
+            <a:spAutoFit/>
+          </a:bodyPr>
+          <a:lstStyle/>
+          <a:p>
+            <a:r>
+              <a:rPr sz="1200" b="1">
+                <a:solidFill>
+                  <a:srgbClr val="C62828"/>
+                </a:solidFill>
+                <a:latin typeface="Calibri"/>
+              </a:rPr>
+              <a:t>What pulls the score down</a:t>
+            </a:r>
+          </a:p>
+        </p:txBody>
+      </p:sp>
+      <p:sp>
+        <p:nvSpPr>
+          <p:cNvPr id="56" name="TextBox 55">
+            <a:extLst>
+              <a:ext uri="{FF2B5EF4-FFF2-40B4-BE49-F238E27FC236}">
+                <a16:creationId xmlns:a16="http://schemas.microsoft.com/office/drawing/2014/main" id="{48E5E894-7C7E-5F85-A7BB-382B79F5BDFB}"/>
+              </a:ext>
+            </a:extLst>
+          </p:cNvPr>
+          <p:cNvSpPr txBox="1"/>
+          <p:nvPr/>
+        </p:nvSpPr>
+        <p:spPr>
+          <a:xfrm>
+            <a:off x="731520" y="3995928"/>
+            <a:ext cx="3383280" cy="201168"/>
+          </a:xfrm>
+          <a:prstGeom prst="rect">
+            <a:avLst/>
+          </a:prstGeom>
+          <a:noFill/>
+        </p:spPr>
+        <p:txBody>
+          <a:bodyPr wrap="square" lIns="36000" tIns="18000" rIns="36000" bIns="18000">
+            <a:spAutoFit/>
+          </a:bodyPr>
+          <a:lstStyle/>
+          <a:p>
+            <a:r>
+              <a:rPr sz="1000" b="1">
+                <a:solidFill>
+                  <a:srgbClr val="1F2F3F"/>
+                </a:solidFill>
+                <a:latin typeface="Calibri"/>
+              </a:rPr>
+              <a:t>•  Missing BP + Lactate</a:t>
+            </a:r>
+          </a:p>
+        </p:txBody>
+      </p:sp>
+      <p:sp>
+        <p:nvSpPr>
+          <p:cNvPr id="57" name="TextBox 56">
+            <a:extLst>
+              <a:ext uri="{FF2B5EF4-FFF2-40B4-BE49-F238E27FC236}">
+                <a16:creationId xmlns:a16="http://schemas.microsoft.com/office/drawing/2014/main" id="{F2381FC9-7015-CDFB-9FEC-0373EC4D1C12}"/>
+              </a:ext>
+            </a:extLst>
+          </p:cNvPr>
+          <p:cNvSpPr txBox="1"/>
+          <p:nvPr/>
+        </p:nvSpPr>
+        <p:spPr>
+          <a:xfrm>
+            <a:off x="914400" y="4197096"/>
+            <a:ext cx="3200400" cy="292608"/>
+          </a:xfrm>
+          <a:prstGeom prst="rect">
+            <a:avLst/>
+          </a:prstGeom>
+          <a:noFill/>
+        </p:spPr>
+        <p:txBody>
+          <a:bodyPr wrap="square" lIns="36000" tIns="18000" rIns="36000" bIns="18000">
+            <a:spAutoFit/>
+          </a:bodyPr>
+          <a:lstStyle/>
+          <a:p>
+            <a:r>
+              <a:rPr sz="900" b="0">
+                <a:solidFill>
+                  <a:srgbClr val="556677"/>
+                </a:solidFill>
+                <a:latin typeface="Calibri"/>
+              </a:rPr>
+              <a:t>8 / 8 false negatives — 100%; LLM stays cautious without anchors</a:t>
+            </a:r>
+          </a:p>
+        </p:txBody>
+      </p:sp>
+      <p:sp>
+        <p:nvSpPr>
+          <p:cNvPr id="58" name="TextBox 57">
+            <a:extLst>
+              <a:ext uri="{FF2B5EF4-FFF2-40B4-BE49-F238E27FC236}">
+                <a16:creationId xmlns:a16="http://schemas.microsoft.com/office/drawing/2014/main" id="{CEDBEA0A-AF78-F349-E90D-3FB10DA9348A}"/>
+              </a:ext>
+            </a:extLst>
+          </p:cNvPr>
+          <p:cNvSpPr txBox="1"/>
+          <p:nvPr/>
+        </p:nvSpPr>
+        <p:spPr>
+          <a:xfrm>
+            <a:off x="731520" y="4453128"/>
+            <a:ext cx="3383280" cy="201168"/>
+          </a:xfrm>
+          <a:prstGeom prst="rect">
+            <a:avLst/>
+          </a:prstGeom>
+          <a:noFill/>
+        </p:spPr>
+        <p:txBody>
+          <a:bodyPr wrap="square" lIns="36000" tIns="18000" rIns="36000" bIns="18000">
+            <a:spAutoFit/>
+          </a:bodyPr>
+          <a:lstStyle/>
+          <a:p>
+            <a:r>
+              <a:rPr sz="1000" b="1">
+                <a:solidFill>
+                  <a:srgbClr val="1F2F3F"/>
+                </a:solidFill>
+                <a:latin typeface="Calibri"/>
+              </a:rPr>
+              <a:t>•  Neonates with adult thresholds</a:t>
+            </a:r>
+          </a:p>
+        </p:txBody>
+      </p:sp>
+      <p:sp>
+        <p:nvSpPr>
+          <p:cNvPr id="59" name="TextBox 58">
+            <a:extLst>
+              <a:ext uri="{FF2B5EF4-FFF2-40B4-BE49-F238E27FC236}">
+                <a16:creationId xmlns:a16="http://schemas.microsoft.com/office/drawing/2014/main" id="{5B5C5B25-E0F7-5723-6DF0-4FC9B3650104}"/>
+              </a:ext>
+            </a:extLst>
+          </p:cNvPr>
+          <p:cNvSpPr txBox="1"/>
+          <p:nvPr/>
+        </p:nvSpPr>
+        <p:spPr>
+          <a:xfrm>
+            <a:off x="914400" y="4654296"/>
+            <a:ext cx="3200400" cy="292608"/>
+          </a:xfrm>
+          <a:prstGeom prst="rect">
+            <a:avLst/>
+          </a:prstGeom>
+          <a:noFill/>
+        </p:spPr>
+        <p:txBody>
+          <a:bodyPr wrap="square" lIns="36000" tIns="18000" rIns="36000" bIns="18000">
+            <a:spAutoFit/>
+          </a:bodyPr>
+          <a:lstStyle/>
+          <a:p>
+            <a:r>
+              <a:rPr sz="900" b="0">
+                <a:solidFill>
+                  <a:srgbClr val="556677"/>
+                </a:solidFill>
+                <a:latin typeface="Calibri"/>
+              </a:rPr>
+              <a:t>5 of 90 patients age=0; 1 FN, 2 FP, 2 TN</a:t>
+            </a:r>
+          </a:p>
+        </p:txBody>
+      </p:sp>
+      <p:sp>
+        <p:nvSpPr>
+          <p:cNvPr id="60" name="TextBox 59">
+            <a:extLst>
+              <a:ext uri="{FF2B5EF4-FFF2-40B4-BE49-F238E27FC236}">
+                <a16:creationId xmlns:a16="http://schemas.microsoft.com/office/drawing/2014/main" id="{E2863EB7-1DA4-48B7-8FD9-6DC2D1FB9F95}"/>
+              </a:ext>
+            </a:extLst>
+          </p:cNvPr>
+          <p:cNvSpPr txBox="1"/>
+          <p:nvPr/>
+        </p:nvSpPr>
+        <p:spPr>
+          <a:xfrm>
+            <a:off x="731520" y="4910328"/>
+            <a:ext cx="3383280" cy="201168"/>
+          </a:xfrm>
+          <a:prstGeom prst="rect">
+            <a:avLst/>
+          </a:prstGeom>
+          <a:noFill/>
+        </p:spPr>
+        <p:txBody>
+          <a:bodyPr wrap="square" lIns="36000" tIns="18000" rIns="36000" bIns="18000">
+            <a:spAutoFit/>
+          </a:bodyPr>
+          <a:lstStyle/>
+          <a:p>
+            <a:r>
+              <a:rPr sz="1000" b="1">
+                <a:solidFill>
+                  <a:srgbClr val="1F2F3F"/>
+                </a:solidFill>
+                <a:latin typeface="Calibri"/>
+              </a:rPr>
+              <a:t>•  Protocol context invisible to guardrail</a:t>
+            </a:r>
+          </a:p>
+        </p:txBody>
+      </p:sp>
+      <p:sp>
+        <p:nvSpPr>
+          <p:cNvPr id="61" name="TextBox 60">
+            <a:extLst>
+              <a:ext uri="{FF2B5EF4-FFF2-40B4-BE49-F238E27FC236}">
+                <a16:creationId xmlns:a16="http://schemas.microsoft.com/office/drawing/2014/main" id="{D7F41D96-D18F-C93B-FC6E-5AE28BEA46CC}"/>
+              </a:ext>
+            </a:extLst>
+          </p:cNvPr>
+          <p:cNvSpPr txBox="1"/>
+          <p:nvPr/>
+        </p:nvSpPr>
+        <p:spPr>
+          <a:xfrm>
+            <a:off x="914400" y="5111496"/>
+            <a:ext cx="3200400" cy="292608"/>
+          </a:xfrm>
+          <a:prstGeom prst="rect">
+            <a:avLst/>
+          </a:prstGeom>
+          <a:noFill/>
+        </p:spPr>
+        <p:txBody>
+          <a:bodyPr wrap="square" lIns="36000" tIns="18000" rIns="36000" bIns="18000">
+            <a:spAutoFit/>
+          </a:bodyPr>
+          <a:lstStyle/>
+          <a:p>
+            <a:r>
+              <a:rPr sz="900" b="0">
+                <a:solidFill>
+                  <a:srgbClr val="556677"/>
+                </a:solidFill>
+                <a:latin typeface="Calibri"/>
+              </a:rPr>
+              <a:t>Therapeutic hypothermia, post-arrest patients flagged</a:t>
+            </a:r>
+          </a:p>
+        </p:txBody>
+      </p:sp>
+      <p:sp>
+        <p:nvSpPr>
+          <p:cNvPr id="62" name="TextBox 61">
+            <a:extLst>
+              <a:ext uri="{FF2B5EF4-FFF2-40B4-BE49-F238E27FC236}">
+                <a16:creationId xmlns:a16="http://schemas.microsoft.com/office/drawing/2014/main" id="{CDFBEC8D-CBE6-FD59-7610-457431FF1F24}"/>
+              </a:ext>
+            </a:extLst>
+          </p:cNvPr>
+          <p:cNvSpPr txBox="1"/>
+          <p:nvPr/>
+        </p:nvSpPr>
+        <p:spPr>
+          <a:xfrm>
+            <a:off x="731520" y="5367528"/>
+            <a:ext cx="3383280" cy="201168"/>
+          </a:xfrm>
+          <a:prstGeom prst="rect">
+            <a:avLst/>
+          </a:prstGeom>
+          <a:noFill/>
+        </p:spPr>
+        <p:txBody>
+          <a:bodyPr wrap="square" lIns="36000" tIns="18000" rIns="36000" bIns="18000">
+            <a:spAutoFit/>
+          </a:bodyPr>
+          <a:lstStyle/>
+          <a:p>
+            <a:r>
+              <a:rPr sz="1000" b="1">
+                <a:solidFill>
+                  <a:srgbClr val="1F2F3F"/>
+                </a:solidFill>
+                <a:latin typeface="Calibri"/>
+              </a:rPr>
+              <a:t>•  ICU patients are SIRS-prone</a:t>
+            </a:r>
+          </a:p>
+        </p:txBody>
+      </p:sp>
+      <p:sp>
+        <p:nvSpPr>
+          <p:cNvPr id="63" name="TextBox 62">
+            <a:extLst>
+              <a:ext uri="{FF2B5EF4-FFF2-40B4-BE49-F238E27FC236}">
+                <a16:creationId xmlns:a16="http://schemas.microsoft.com/office/drawing/2014/main" id="{51CE47A1-050C-51D6-27D1-58441479B8A3}"/>
+              </a:ext>
+            </a:extLst>
+          </p:cNvPr>
+          <p:cNvSpPr txBox="1"/>
+          <p:nvPr/>
+        </p:nvSpPr>
+        <p:spPr>
+          <a:xfrm>
+            <a:off x="914400" y="5568696"/>
+            <a:ext cx="3200400" cy="292608"/>
+          </a:xfrm>
+          <a:prstGeom prst="rect">
+            <a:avLst/>
+          </a:prstGeom>
+          <a:noFill/>
+        </p:spPr>
+        <p:txBody>
+          <a:bodyPr wrap="square" lIns="36000" tIns="18000" rIns="36000" bIns="18000">
+            <a:spAutoFit/>
+          </a:bodyPr>
+          <a:lstStyle/>
+          <a:p>
+            <a:r>
+              <a:rPr sz="900" b="0">
+                <a:solidFill>
+                  <a:srgbClr val="556677"/>
+                </a:solidFill>
+                <a:latin typeface="Calibri"/>
+              </a:rPr>
+              <a:t>12 of 22 FPs are post-op / COPD meeting 2-of-4 SIRS</a:t>
+            </a:r>
+          </a:p>
+        </p:txBody>
+      </p:sp>
+      <p:sp>
+        <p:nvSpPr>
+          <p:cNvPr id="64" name="TextBox 63">
+            <a:extLst>
+              <a:ext uri="{FF2B5EF4-FFF2-40B4-BE49-F238E27FC236}">
+                <a16:creationId xmlns:a16="http://schemas.microsoft.com/office/drawing/2014/main" id="{F421E8BF-3D17-0C63-27DF-269AAE04A7B4}"/>
+              </a:ext>
+            </a:extLst>
+          </p:cNvPr>
+          <p:cNvSpPr txBox="1"/>
+          <p:nvPr/>
+        </p:nvSpPr>
+        <p:spPr>
+          <a:xfrm>
+            <a:off x="731520" y="5824728"/>
+            <a:ext cx="3383280" cy="201168"/>
+          </a:xfrm>
+          <a:prstGeom prst="rect">
+            <a:avLst/>
+          </a:prstGeom>
+          <a:noFill/>
+        </p:spPr>
+        <p:txBody>
+          <a:bodyPr wrap="square" lIns="36000" tIns="18000" rIns="36000" bIns="18000">
+            <a:spAutoFit/>
+          </a:bodyPr>
+          <a:lstStyle/>
+          <a:p>
+            <a:r>
+              <a:rPr sz="1000" b="1">
+                <a:solidFill>
+                  <a:srgbClr val="1F2F3F"/>
+                </a:solidFill>
+                <a:latin typeface="Calibri"/>
+              </a:rPr>
+              <a:t>•  ICD-9 sepsis labels (vs Sepsis-3)</a:t>
+            </a:r>
+          </a:p>
+        </p:txBody>
+      </p:sp>
+      <p:sp>
+        <p:nvSpPr>
+          <p:cNvPr id="65" name="TextBox 64">
+            <a:extLst>
+              <a:ext uri="{FF2B5EF4-FFF2-40B4-BE49-F238E27FC236}">
+                <a16:creationId xmlns:a16="http://schemas.microsoft.com/office/drawing/2014/main" id="{221F8D5B-0DCE-BBFA-4595-6F3F59A274AC}"/>
+              </a:ext>
+            </a:extLst>
+          </p:cNvPr>
+          <p:cNvSpPr txBox="1"/>
+          <p:nvPr/>
+        </p:nvSpPr>
+        <p:spPr>
+          <a:xfrm>
+            <a:off x="914400" y="6025896"/>
+            <a:ext cx="3200400" cy="292608"/>
+          </a:xfrm>
+          <a:prstGeom prst="rect">
+            <a:avLst/>
+          </a:prstGeom>
+          <a:noFill/>
+        </p:spPr>
+        <p:txBody>
+          <a:bodyPr wrap="square" lIns="36000" tIns="18000" rIns="36000" bIns="18000">
+            <a:spAutoFit/>
+          </a:bodyPr>
+          <a:lstStyle/>
+          <a:p>
+            <a:r>
+              <a:rPr sz="900" b="0">
+                <a:solidFill>
+                  <a:srgbClr val="556677"/>
+                </a:solidFill>
+                <a:latin typeface="Calibri"/>
+              </a:rPr>
+              <a:t>Some "controls" may be undocumented sepsis</a:t>
+            </a:r>
+          </a:p>
+        </p:txBody>
+      </p:sp>
+      <p:sp>
+        <p:nvSpPr>
+          <p:cNvPr id="66" name="Rectangle 65">
+            <a:extLst>
+              <a:ext uri="{FF2B5EF4-FFF2-40B4-BE49-F238E27FC236}">
+                <a16:creationId xmlns:a16="http://schemas.microsoft.com/office/drawing/2014/main" id="{7F123E6A-3686-9AC0-638A-E3270ADFF739}"/>
+              </a:ext>
+            </a:extLst>
+          </p:cNvPr>
+          <p:cNvSpPr/>
+          <p:nvPr/>
+        </p:nvSpPr>
+        <p:spPr>
+          <a:xfrm>
+            <a:off x="4389120" y="3584448"/>
+            <a:ext cx="3657600" cy="2834640"/>
+          </a:xfrm>
+          <a:prstGeom prst="rect">
+            <a:avLst/>
+          </a:prstGeom>
+          <a:solidFill>
+            <a:srgbClr val="E8F4F8"/>
+          </a:solidFill>
+          <a:ln>
+            <a:noFill/>
+          </a:ln>
+          <a:effectLst/>
+        </p:spPr>
+        <p:style>
+          <a:lnRef idx="1">
+            <a:schemeClr val="accent1"/>
+          </a:lnRef>
+          <a:fillRef idx="3">
+            <a:schemeClr val="accent1"/>
+          </a:fillRef>
+          <a:effectRef idx="2">
+            <a:schemeClr val="accent1"/>
+          </a:effectRef>
+          <a:fontRef idx="minor">
+            <a:schemeClr val="lt1"/>
+          </a:fontRef>
+        </p:style>
+        <p:txBody>
+          <a:bodyPr rtlCol="0" anchor="ctr"/>
+          <a:lstStyle/>
+          <a:p>
+            <a:pPr algn="ctr"/>
+            <a:endParaRPr/>
+          </a:p>
+        </p:txBody>
+      </p:sp>
+      <p:sp>
+        <p:nvSpPr>
+          <p:cNvPr id="67" name="Rectangle 66">
+            <a:extLst>
+              <a:ext uri="{FF2B5EF4-FFF2-40B4-BE49-F238E27FC236}">
+                <a16:creationId xmlns:a16="http://schemas.microsoft.com/office/drawing/2014/main" id="{A31AB954-4632-FC1F-191D-70A4698DB6C7}"/>
+              </a:ext>
+            </a:extLst>
+          </p:cNvPr>
+          <p:cNvSpPr/>
+          <p:nvPr/>
+        </p:nvSpPr>
+        <p:spPr>
+          <a:xfrm>
+            <a:off x="4389120" y="3584448"/>
+            <a:ext cx="91440" cy="2834640"/>
+          </a:xfrm>
+          <a:prstGeom prst="rect">
+            <a:avLst/>
+          </a:prstGeom>
+          <a:solidFill>
+            <a:srgbClr val="49AAD4"/>
+          </a:solidFill>
+          <a:ln>
+            <a:noFill/>
+          </a:ln>
+          <a:effectLst/>
+        </p:spPr>
+        <p:style>
+          <a:lnRef idx="1">
+            <a:schemeClr val="accent1"/>
+          </a:lnRef>
+          <a:fillRef idx="3">
+            <a:schemeClr val="accent1"/>
+          </a:fillRef>
+          <a:effectRef idx="2">
+            <a:schemeClr val="accent1"/>
+          </a:effectRef>
+          <a:fontRef idx="minor">
+            <a:schemeClr val="lt1"/>
+          </a:fontRef>
+        </p:style>
+        <p:txBody>
+          <a:bodyPr rtlCol="0" anchor="ctr"/>
+          <a:lstStyle/>
+          <a:p>
+            <a:pPr algn="ctr"/>
+            <a:endParaRPr/>
+          </a:p>
+        </p:txBody>
+      </p:sp>
+      <p:sp>
+        <p:nvSpPr>
+          <p:cNvPr id="68" name="TextBox 67">
+            <a:extLst>
+              <a:ext uri="{FF2B5EF4-FFF2-40B4-BE49-F238E27FC236}">
+                <a16:creationId xmlns:a16="http://schemas.microsoft.com/office/drawing/2014/main" id="{FD7DC7AF-2FD2-086B-58C1-B3717FC81764}"/>
+              </a:ext>
+            </a:extLst>
+          </p:cNvPr>
+          <p:cNvSpPr txBox="1"/>
+          <p:nvPr/>
+        </p:nvSpPr>
+        <p:spPr>
+          <a:xfrm>
+            <a:off x="4572000" y="3657600"/>
+            <a:ext cx="3383280" cy="274320"/>
+          </a:xfrm>
+          <a:prstGeom prst="rect">
+            <a:avLst/>
+          </a:prstGeom>
+          <a:noFill/>
+        </p:spPr>
+        <p:txBody>
+          <a:bodyPr wrap="square" lIns="36000" tIns="18000" rIns="36000" bIns="18000">
+            <a:spAutoFit/>
+          </a:bodyPr>
+          <a:lstStyle/>
+          <a:p>
+            <a:r>
+              <a:rPr sz="1200" b="1">
+                <a:solidFill>
+                  <a:srgbClr val="1E6C93"/>
+                </a:solidFill>
+                <a:latin typeface="Calibri"/>
+              </a:rPr>
+              <a:t>Data Quality — what we hit</a:t>
+            </a:r>
+          </a:p>
+        </p:txBody>
+      </p:sp>
+      <p:sp>
+        <p:nvSpPr>
+          <p:cNvPr id="75" name="TextBox 74">
+            <a:extLst>
+              <a:ext uri="{FF2B5EF4-FFF2-40B4-BE49-F238E27FC236}">
+                <a16:creationId xmlns:a16="http://schemas.microsoft.com/office/drawing/2014/main" id="{53EF307E-862F-5642-7F14-3E197667E009}"/>
+              </a:ext>
+            </a:extLst>
+          </p:cNvPr>
+          <p:cNvSpPr txBox="1"/>
+          <p:nvPr/>
+        </p:nvSpPr>
+        <p:spPr>
+          <a:xfrm>
+            <a:off x="4585716" y="4059936"/>
+            <a:ext cx="3383280" cy="190240"/>
+          </a:xfrm>
+          <a:prstGeom prst="rect">
+            <a:avLst/>
+          </a:prstGeom>
+          <a:noFill/>
+        </p:spPr>
+        <p:txBody>
+          <a:bodyPr wrap="square" lIns="36000" tIns="18000" rIns="36000" bIns="18000">
+            <a:spAutoFit/>
+          </a:bodyPr>
+          <a:lstStyle/>
+          <a:p>
+            <a:r>
+              <a:rPr sz="1000" b="1" dirty="0">
+                <a:solidFill>
+                  <a:srgbClr val="1F2F3F"/>
+                </a:solidFill>
+                <a:latin typeface="Calibri"/>
+              </a:rPr>
+              <a:t>•  </a:t>
+            </a:r>
+            <a:r>
+              <a:rPr sz="1000" b="1" dirty="0" err="1">
+                <a:solidFill>
+                  <a:srgbClr val="1F2F3F"/>
+                </a:solidFill>
+                <a:latin typeface="Calibri"/>
+              </a:rPr>
+              <a:t>Missin</a:t>
+            </a:r>
+            <a:r>
+              <a:rPr lang="en-US" sz="1000" b="1" dirty="0" err="1">
+                <a:solidFill>
+                  <a:srgbClr val="1F2F3F"/>
+                </a:solidFill>
+                <a:latin typeface="Calibri"/>
+              </a:rPr>
+              <a:t>z</a:t>
+            </a:r>
+            <a:r>
+              <a:rPr sz="1000" b="1" dirty="0" err="1">
+                <a:solidFill>
+                  <a:srgbClr val="1F2F3F"/>
+                </a:solidFill>
+                <a:latin typeface="Calibri"/>
+              </a:rPr>
+              <a:t>g</a:t>
+            </a:r>
+            <a:r>
+              <a:rPr sz="1000" b="1" dirty="0">
+                <a:solidFill>
+                  <a:srgbClr val="1F2F3F"/>
+                </a:solidFill>
+                <a:latin typeface="Calibri"/>
+              </a:rPr>
+              <a:t> BP / Lactate per patient</a:t>
+            </a:r>
+          </a:p>
+        </p:txBody>
+      </p:sp>
+      <p:sp>
+        <p:nvSpPr>
+          <p:cNvPr id="76" name="TextBox 75">
+            <a:extLst>
+              <a:ext uri="{FF2B5EF4-FFF2-40B4-BE49-F238E27FC236}">
+                <a16:creationId xmlns:a16="http://schemas.microsoft.com/office/drawing/2014/main" id="{84A50CB4-FA68-9C17-89D3-E17DC0C82C64}"/>
+              </a:ext>
+            </a:extLst>
+          </p:cNvPr>
+          <p:cNvSpPr txBox="1"/>
+          <p:nvPr/>
+        </p:nvSpPr>
+        <p:spPr>
+          <a:xfrm>
+            <a:off x="4768596" y="4261104"/>
+            <a:ext cx="3200400" cy="146304"/>
+          </a:xfrm>
+          <a:prstGeom prst="rect">
+            <a:avLst/>
+          </a:prstGeom>
+          <a:noFill/>
+        </p:spPr>
+        <p:txBody>
+          <a:bodyPr wrap="square" lIns="36000" tIns="18000" rIns="36000" bIns="18000">
+            <a:spAutoFit/>
+          </a:bodyPr>
+          <a:lstStyle/>
+          <a:p>
+            <a:r>
+              <a:rPr sz="900" b="0" dirty="0">
+                <a:solidFill>
+                  <a:srgbClr val="556677"/>
+                </a:solidFill>
+                <a:latin typeface="Calibri"/>
+              </a:rPr>
+              <a:t>Drives every FN</a:t>
+            </a:r>
+          </a:p>
+        </p:txBody>
+      </p:sp>
+      <p:sp>
+        <p:nvSpPr>
+          <p:cNvPr id="77" name="TextBox 76">
+            <a:extLst>
+              <a:ext uri="{FF2B5EF4-FFF2-40B4-BE49-F238E27FC236}">
+                <a16:creationId xmlns:a16="http://schemas.microsoft.com/office/drawing/2014/main" id="{7F834B39-76F0-CE2F-7EE6-A754688A0CEF}"/>
+              </a:ext>
+            </a:extLst>
+          </p:cNvPr>
+          <p:cNvSpPr txBox="1"/>
+          <p:nvPr/>
+        </p:nvSpPr>
+        <p:spPr>
+          <a:xfrm>
+            <a:off x="4768596" y="4389120"/>
+            <a:ext cx="3200400" cy="146304"/>
+          </a:xfrm>
+          <a:prstGeom prst="rect">
+            <a:avLst/>
+          </a:prstGeom>
+          <a:noFill/>
+        </p:spPr>
+        <p:txBody>
+          <a:bodyPr wrap="square" lIns="36000" tIns="18000" rIns="36000" bIns="18000">
+            <a:spAutoFit/>
+          </a:bodyPr>
+          <a:lstStyle/>
+          <a:p>
+            <a:r>
+              <a:rPr sz="900" b="1" dirty="0">
+                <a:solidFill>
+                  <a:srgbClr val="E65C00"/>
+                </a:solidFill>
+                <a:latin typeface="Calibri"/>
+              </a:rPr>
+              <a:t>◯ Open — production data</a:t>
+            </a:r>
+          </a:p>
+        </p:txBody>
+      </p:sp>
+      <p:sp>
+        <p:nvSpPr>
+          <p:cNvPr id="78" name="TextBox 77">
+            <a:extLst>
+              <a:ext uri="{FF2B5EF4-FFF2-40B4-BE49-F238E27FC236}">
+                <a16:creationId xmlns:a16="http://schemas.microsoft.com/office/drawing/2014/main" id="{D206A7F7-5BBC-D63F-D6F1-2D244D873F8C}"/>
+              </a:ext>
+            </a:extLst>
+          </p:cNvPr>
+          <p:cNvSpPr txBox="1"/>
+          <p:nvPr/>
+        </p:nvSpPr>
+        <p:spPr>
+          <a:xfrm>
+            <a:off x="4585716" y="4517136"/>
+            <a:ext cx="3383280" cy="201168"/>
+          </a:xfrm>
+          <a:prstGeom prst="rect">
+            <a:avLst/>
+          </a:prstGeom>
+          <a:noFill/>
+        </p:spPr>
+        <p:txBody>
+          <a:bodyPr wrap="square" lIns="36000" tIns="18000" rIns="36000" bIns="18000">
+            <a:spAutoFit/>
+          </a:bodyPr>
+          <a:lstStyle/>
+          <a:p>
+            <a:r>
+              <a:rPr sz="1000" b="1" dirty="0">
+                <a:solidFill>
+                  <a:srgbClr val="1F2F3F"/>
+                </a:solidFill>
+                <a:latin typeface="Calibri"/>
+              </a:rPr>
+              <a:t>•  Neonates included (age=0)</a:t>
+            </a:r>
+          </a:p>
+        </p:txBody>
+      </p:sp>
+      <p:sp>
+        <p:nvSpPr>
+          <p:cNvPr id="79" name="TextBox 78">
+            <a:extLst>
+              <a:ext uri="{FF2B5EF4-FFF2-40B4-BE49-F238E27FC236}">
+                <a16:creationId xmlns:a16="http://schemas.microsoft.com/office/drawing/2014/main" id="{C2F5CCEF-4290-F960-837C-22AF8C5478AC}"/>
+              </a:ext>
+            </a:extLst>
+          </p:cNvPr>
+          <p:cNvSpPr txBox="1"/>
+          <p:nvPr/>
+        </p:nvSpPr>
+        <p:spPr>
+          <a:xfrm>
+            <a:off x="4768596" y="4718304"/>
+            <a:ext cx="3200400" cy="146304"/>
+          </a:xfrm>
+          <a:prstGeom prst="rect">
+            <a:avLst/>
+          </a:prstGeom>
+          <a:noFill/>
+        </p:spPr>
+        <p:txBody>
+          <a:bodyPr wrap="square" lIns="36000" tIns="18000" rIns="36000" bIns="18000">
+            <a:spAutoFit/>
+          </a:bodyPr>
+          <a:lstStyle/>
+          <a:p>
+            <a:r>
+              <a:rPr sz="900" b="0" dirty="0">
+                <a:solidFill>
+                  <a:srgbClr val="556677"/>
+                </a:solidFill>
+                <a:latin typeface="Calibri"/>
+              </a:rPr>
+              <a:t>Adult thresholds inappropriate</a:t>
+            </a:r>
+          </a:p>
+        </p:txBody>
+      </p:sp>
+      <p:sp>
+        <p:nvSpPr>
+          <p:cNvPr id="80" name="TextBox 79">
+            <a:extLst>
+              <a:ext uri="{FF2B5EF4-FFF2-40B4-BE49-F238E27FC236}">
+                <a16:creationId xmlns:a16="http://schemas.microsoft.com/office/drawing/2014/main" id="{ACC4DF33-9E97-24CE-B6B7-763CB65F239C}"/>
+              </a:ext>
+            </a:extLst>
+          </p:cNvPr>
+          <p:cNvSpPr txBox="1"/>
+          <p:nvPr/>
+        </p:nvSpPr>
+        <p:spPr>
+          <a:xfrm>
+            <a:off x="4768596" y="4846320"/>
+            <a:ext cx="3200400" cy="146304"/>
+          </a:xfrm>
+          <a:prstGeom prst="rect">
+            <a:avLst/>
+          </a:prstGeom>
+          <a:noFill/>
+        </p:spPr>
+        <p:txBody>
+          <a:bodyPr wrap="square" lIns="36000" tIns="18000" rIns="36000" bIns="18000">
+            <a:spAutoFit/>
+          </a:bodyPr>
+          <a:lstStyle/>
+          <a:p>
+            <a:r>
+              <a:rPr sz="900" b="1">
+                <a:solidFill>
+                  <a:srgbClr val="2E7D32"/>
+                </a:solidFill>
+                <a:latin typeface="Calibri"/>
+              </a:rPr>
+              <a:t>✓ Excluded in adjusted view</a:t>
+            </a:r>
+          </a:p>
+        </p:txBody>
+      </p:sp>
+      <p:sp>
+        <p:nvSpPr>
+          <p:cNvPr id="81" name="TextBox 80">
+            <a:extLst>
+              <a:ext uri="{FF2B5EF4-FFF2-40B4-BE49-F238E27FC236}">
+                <a16:creationId xmlns:a16="http://schemas.microsoft.com/office/drawing/2014/main" id="{350EA5D0-69E1-8379-902A-093A4EE6D4DD}"/>
+              </a:ext>
+            </a:extLst>
+          </p:cNvPr>
+          <p:cNvSpPr txBox="1"/>
+          <p:nvPr/>
+        </p:nvSpPr>
+        <p:spPr>
+          <a:xfrm>
+            <a:off x="4585716" y="4974336"/>
+            <a:ext cx="3383280" cy="201168"/>
+          </a:xfrm>
+          <a:prstGeom prst="rect">
+            <a:avLst/>
+          </a:prstGeom>
+          <a:noFill/>
+        </p:spPr>
+        <p:txBody>
+          <a:bodyPr wrap="square" lIns="36000" tIns="18000" rIns="36000" bIns="18000">
+            <a:spAutoFit/>
+          </a:bodyPr>
+          <a:lstStyle/>
+          <a:p>
+            <a:r>
+              <a:rPr sz="1000" b="1">
+                <a:solidFill>
+                  <a:srgbClr val="1F2F3F"/>
+                </a:solidFill>
+                <a:latin typeface="Calibri"/>
+              </a:rPr>
+              <a:t>•  Note sparsity (17% &lt; 200 chars)</a:t>
+            </a:r>
+          </a:p>
+        </p:txBody>
+      </p:sp>
+      <p:sp>
+        <p:nvSpPr>
+          <p:cNvPr id="82" name="TextBox 81">
+            <a:extLst>
+              <a:ext uri="{FF2B5EF4-FFF2-40B4-BE49-F238E27FC236}">
+                <a16:creationId xmlns:a16="http://schemas.microsoft.com/office/drawing/2014/main" id="{E015D95D-9405-195A-33ED-8D3778CDD3DB}"/>
+              </a:ext>
+            </a:extLst>
+          </p:cNvPr>
+          <p:cNvSpPr txBox="1"/>
+          <p:nvPr/>
+        </p:nvSpPr>
+        <p:spPr>
+          <a:xfrm>
+            <a:off x="4768596" y="5175504"/>
+            <a:ext cx="3200400" cy="146304"/>
+          </a:xfrm>
+          <a:prstGeom prst="rect">
+            <a:avLst/>
+          </a:prstGeom>
+          <a:noFill/>
+        </p:spPr>
+        <p:txBody>
+          <a:bodyPr wrap="square" lIns="36000" tIns="18000" rIns="36000" bIns="18000">
+            <a:spAutoFit/>
+          </a:bodyPr>
+          <a:lstStyle/>
+          <a:p>
+            <a:r>
+              <a:rPr sz="900" b="0">
+                <a:solidFill>
+                  <a:srgbClr val="556677"/>
+                </a:solidFill>
+                <a:latin typeface="Calibri"/>
+              </a:rPr>
+              <a:t>Reduces signal for those patients</a:t>
+            </a:r>
+          </a:p>
+        </p:txBody>
+      </p:sp>
+      <p:sp>
+        <p:nvSpPr>
+          <p:cNvPr id="83" name="TextBox 82">
+            <a:extLst>
+              <a:ext uri="{FF2B5EF4-FFF2-40B4-BE49-F238E27FC236}">
+                <a16:creationId xmlns:a16="http://schemas.microsoft.com/office/drawing/2014/main" id="{8D44548F-6818-63A2-DA06-14777303A2A9}"/>
+              </a:ext>
+            </a:extLst>
+          </p:cNvPr>
+          <p:cNvSpPr txBox="1"/>
+          <p:nvPr/>
+        </p:nvSpPr>
+        <p:spPr>
+          <a:xfrm>
+            <a:off x="4768596" y="5303520"/>
+            <a:ext cx="3200400" cy="146304"/>
+          </a:xfrm>
+          <a:prstGeom prst="rect">
+            <a:avLst/>
+          </a:prstGeom>
+          <a:noFill/>
+        </p:spPr>
+        <p:txBody>
+          <a:bodyPr wrap="square" lIns="36000" tIns="18000" rIns="36000" bIns="18000">
+            <a:spAutoFit/>
+          </a:bodyPr>
+          <a:lstStyle/>
+          <a:p>
+            <a:r>
+              <a:rPr sz="900" b="1">
+                <a:solidFill>
+                  <a:srgbClr val="E65C00"/>
+                </a:solidFill>
+                <a:latin typeface="Calibri"/>
+              </a:rPr>
+              <a:t>◯ Tolerable for now</a:t>
+            </a:r>
+          </a:p>
+        </p:txBody>
+      </p:sp>
+      <p:sp>
+        <p:nvSpPr>
+          <p:cNvPr id="84" name="Rectangle 83">
+            <a:extLst>
+              <a:ext uri="{FF2B5EF4-FFF2-40B4-BE49-F238E27FC236}">
+                <a16:creationId xmlns:a16="http://schemas.microsoft.com/office/drawing/2014/main" id="{41A9E29A-1C49-684D-82ED-C5F403EFF89D}"/>
+              </a:ext>
+            </a:extLst>
+          </p:cNvPr>
+          <p:cNvSpPr/>
+          <p:nvPr/>
+        </p:nvSpPr>
+        <p:spPr>
+          <a:xfrm>
+            <a:off x="8229600" y="3584448"/>
+            <a:ext cx="3657600" cy="2834640"/>
+          </a:xfrm>
+          <a:prstGeom prst="rect">
+            <a:avLst/>
+          </a:prstGeom>
+          <a:solidFill>
+            <a:srgbClr val="E8F4F8"/>
+          </a:solidFill>
+          <a:ln>
+            <a:noFill/>
+          </a:ln>
+          <a:effectLst/>
+        </p:spPr>
+        <p:style>
+          <a:lnRef idx="1">
+            <a:schemeClr val="accent1"/>
+          </a:lnRef>
+          <a:fillRef idx="3">
+            <a:schemeClr val="accent1"/>
+          </a:fillRef>
+          <a:effectRef idx="2">
+            <a:schemeClr val="accent1"/>
+          </a:effectRef>
+          <a:fontRef idx="minor">
+            <a:schemeClr val="lt1"/>
+          </a:fontRef>
+        </p:style>
+        <p:txBody>
+          <a:bodyPr rtlCol="0" anchor="ctr"/>
+          <a:lstStyle/>
+          <a:p>
+            <a:pPr algn="ctr"/>
+            <a:endParaRPr/>
+          </a:p>
+        </p:txBody>
+      </p:sp>
+      <p:sp>
+        <p:nvSpPr>
+          <p:cNvPr id="85" name="Rectangle 84">
+            <a:extLst>
+              <a:ext uri="{FF2B5EF4-FFF2-40B4-BE49-F238E27FC236}">
+                <a16:creationId xmlns:a16="http://schemas.microsoft.com/office/drawing/2014/main" id="{3F8BFBB2-A51F-0B55-049A-99883E82CA16}"/>
+              </a:ext>
+            </a:extLst>
+          </p:cNvPr>
+          <p:cNvSpPr/>
+          <p:nvPr/>
+        </p:nvSpPr>
+        <p:spPr>
+          <a:xfrm>
+            <a:off x="8229600" y="3584448"/>
+            <a:ext cx="91440" cy="2834640"/>
+          </a:xfrm>
+          <a:prstGeom prst="rect">
+            <a:avLst/>
+          </a:prstGeom>
+          <a:solidFill>
+            <a:srgbClr val="2E7D32"/>
+          </a:solidFill>
+          <a:ln>
+            <a:noFill/>
+          </a:ln>
+          <a:effectLst/>
+        </p:spPr>
+        <p:style>
+          <a:lnRef idx="1">
+            <a:schemeClr val="accent1"/>
+          </a:lnRef>
+          <a:fillRef idx="3">
+            <a:schemeClr val="accent1"/>
+          </a:fillRef>
+          <a:effectRef idx="2">
+            <a:schemeClr val="accent1"/>
+          </a:effectRef>
+          <a:fontRef idx="minor">
+            <a:schemeClr val="lt1"/>
+          </a:fontRef>
+        </p:style>
+        <p:txBody>
+          <a:bodyPr rtlCol="0" anchor="ctr"/>
+          <a:lstStyle/>
+          <a:p>
+            <a:pPr algn="ctr"/>
+            <a:endParaRPr/>
+          </a:p>
+        </p:txBody>
+      </p:sp>
+      <p:sp>
+        <p:nvSpPr>
+          <p:cNvPr id="86" name="TextBox 85">
+            <a:extLst>
+              <a:ext uri="{FF2B5EF4-FFF2-40B4-BE49-F238E27FC236}">
+                <a16:creationId xmlns:a16="http://schemas.microsoft.com/office/drawing/2014/main" id="{CD58EB18-EF2E-774B-D401-54FC39CCB460}"/>
+              </a:ext>
+            </a:extLst>
+          </p:cNvPr>
+          <p:cNvSpPr txBox="1"/>
+          <p:nvPr/>
+        </p:nvSpPr>
+        <p:spPr>
+          <a:xfrm>
+            <a:off x="8412480" y="3657600"/>
+            <a:ext cx="3383280" cy="274320"/>
+          </a:xfrm>
+          <a:prstGeom prst="rect">
+            <a:avLst/>
+          </a:prstGeom>
+          <a:noFill/>
+        </p:spPr>
+        <p:txBody>
+          <a:bodyPr wrap="square" lIns="36000" tIns="18000" rIns="36000" bIns="18000">
+            <a:spAutoFit/>
+          </a:bodyPr>
+          <a:lstStyle/>
+          <a:p>
+            <a:r>
+              <a:rPr sz="1200" b="1">
+                <a:solidFill>
+                  <a:srgbClr val="2E7D32"/>
+                </a:solidFill>
+                <a:latin typeface="Calibri"/>
+              </a:rPr>
+              <a:t>Levers to push it further</a:t>
+            </a:r>
+          </a:p>
+        </p:txBody>
+      </p:sp>
+      <p:sp>
+        <p:nvSpPr>
+          <p:cNvPr id="87" name="TextBox 86">
+            <a:extLst>
+              <a:ext uri="{FF2B5EF4-FFF2-40B4-BE49-F238E27FC236}">
+                <a16:creationId xmlns:a16="http://schemas.microsoft.com/office/drawing/2014/main" id="{B329CB87-43B6-226B-A14A-60E60F72B3BE}"/>
+              </a:ext>
+            </a:extLst>
+          </p:cNvPr>
+          <p:cNvSpPr txBox="1"/>
+          <p:nvPr/>
+        </p:nvSpPr>
+        <p:spPr>
+          <a:xfrm>
+            <a:off x="8412480" y="3995928"/>
+            <a:ext cx="3383280" cy="201168"/>
+          </a:xfrm>
+          <a:prstGeom prst="rect">
+            <a:avLst/>
+          </a:prstGeom>
+          <a:noFill/>
+        </p:spPr>
+        <p:txBody>
+          <a:bodyPr wrap="square" lIns="36000" tIns="18000" rIns="36000" bIns="18000">
+            <a:spAutoFit/>
+          </a:bodyPr>
+          <a:lstStyle/>
+          <a:p>
+            <a:r>
+              <a:rPr sz="1000" b="1">
+                <a:solidFill>
+                  <a:srgbClr val="1F2F3F"/>
+                </a:solidFill>
+                <a:latin typeface="Calibri"/>
+              </a:rPr>
+              <a:t>•  Native EHR vitals (BP / MAP / Lactate)</a:t>
+            </a:r>
+          </a:p>
+        </p:txBody>
+      </p:sp>
+      <p:sp>
+        <p:nvSpPr>
+          <p:cNvPr id="88" name="TextBox 87">
+            <a:extLst>
+              <a:ext uri="{FF2B5EF4-FFF2-40B4-BE49-F238E27FC236}">
+                <a16:creationId xmlns:a16="http://schemas.microsoft.com/office/drawing/2014/main" id="{6398B3A2-3886-57B1-9C97-4454251BF0AF}"/>
+              </a:ext>
+            </a:extLst>
+          </p:cNvPr>
+          <p:cNvSpPr txBox="1"/>
+          <p:nvPr/>
+        </p:nvSpPr>
+        <p:spPr>
+          <a:xfrm>
+            <a:off x="8595360" y="4197096"/>
+            <a:ext cx="3200400" cy="292608"/>
+          </a:xfrm>
+          <a:prstGeom prst="rect">
+            <a:avLst/>
+          </a:prstGeom>
+          <a:noFill/>
+        </p:spPr>
+        <p:txBody>
+          <a:bodyPr wrap="square" lIns="36000" tIns="18000" rIns="36000" bIns="18000">
+            <a:spAutoFit/>
+          </a:bodyPr>
+          <a:lstStyle/>
+          <a:p>
+            <a:r>
+              <a:rPr sz="900" b="0">
+                <a:solidFill>
+                  <a:srgbClr val="556677"/>
+                </a:solidFill>
+                <a:latin typeface="Calibri"/>
+              </a:rPr>
+              <a:t>Resolves dominant FN cause; +10-15 sens points expected</a:t>
+            </a:r>
+          </a:p>
+        </p:txBody>
+      </p:sp>
+      <p:sp>
+        <p:nvSpPr>
+          <p:cNvPr id="89" name="TextBox 88">
+            <a:extLst>
+              <a:ext uri="{FF2B5EF4-FFF2-40B4-BE49-F238E27FC236}">
+                <a16:creationId xmlns:a16="http://schemas.microsoft.com/office/drawing/2014/main" id="{72F3BC7F-47A7-46FB-117E-62930185B07F}"/>
+              </a:ext>
+            </a:extLst>
+          </p:cNvPr>
+          <p:cNvSpPr txBox="1"/>
+          <p:nvPr/>
+        </p:nvSpPr>
+        <p:spPr>
+          <a:xfrm>
+            <a:off x="8412480" y="4453128"/>
+            <a:ext cx="3383280" cy="201168"/>
+          </a:xfrm>
+          <a:prstGeom prst="rect">
+            <a:avLst/>
+          </a:prstGeom>
+          <a:noFill/>
+        </p:spPr>
+        <p:txBody>
+          <a:bodyPr wrap="square" lIns="36000" tIns="18000" rIns="36000" bIns="18000">
+            <a:spAutoFit/>
+          </a:bodyPr>
+          <a:lstStyle/>
+          <a:p>
+            <a:r>
+              <a:rPr sz="1000" b="1">
+                <a:solidFill>
+                  <a:srgbClr val="1F2F3F"/>
+                </a:solidFill>
+                <a:latin typeface="Calibri"/>
+              </a:rPr>
+              <a:t>•  Real MD notes &amp; discharge summaries</a:t>
+            </a:r>
+          </a:p>
+        </p:txBody>
+      </p:sp>
+      <p:sp>
+        <p:nvSpPr>
+          <p:cNvPr id="90" name="TextBox 89">
+            <a:extLst>
+              <a:ext uri="{FF2B5EF4-FFF2-40B4-BE49-F238E27FC236}">
+                <a16:creationId xmlns:a16="http://schemas.microsoft.com/office/drawing/2014/main" id="{38AAC3A0-18C5-6B6C-016A-46E52D2432D7}"/>
+              </a:ext>
+            </a:extLst>
+          </p:cNvPr>
+          <p:cNvSpPr txBox="1"/>
+          <p:nvPr/>
+        </p:nvSpPr>
+        <p:spPr>
+          <a:xfrm>
+            <a:off x="8595360" y="4654296"/>
+            <a:ext cx="3200400" cy="292608"/>
+          </a:xfrm>
+          <a:prstGeom prst="rect">
+            <a:avLst/>
+          </a:prstGeom>
+          <a:noFill/>
+        </p:spPr>
+        <p:txBody>
+          <a:bodyPr wrap="square" lIns="36000" tIns="18000" rIns="36000" bIns="18000">
+            <a:spAutoFit/>
+          </a:bodyPr>
+          <a:lstStyle/>
+          <a:p>
+            <a:r>
+              <a:rPr sz="900" b="0">
+                <a:solidFill>
+                  <a:srgbClr val="556677"/>
+                </a:solidFill>
+                <a:latin typeface="Calibri"/>
+              </a:rPr>
+              <a:t>Captures clinical workup signals (cultures, antibiotics ordered)</a:t>
+            </a:r>
+          </a:p>
+        </p:txBody>
+      </p:sp>
+      <p:sp>
+        <p:nvSpPr>
+          <p:cNvPr id="91" name="TextBox 90">
+            <a:extLst>
+              <a:ext uri="{FF2B5EF4-FFF2-40B4-BE49-F238E27FC236}">
+                <a16:creationId xmlns:a16="http://schemas.microsoft.com/office/drawing/2014/main" id="{0354B3FE-5F63-A992-2831-20802706C194}"/>
+              </a:ext>
+            </a:extLst>
+          </p:cNvPr>
+          <p:cNvSpPr txBox="1"/>
+          <p:nvPr/>
+        </p:nvSpPr>
+        <p:spPr>
+          <a:xfrm>
+            <a:off x="8412480" y="4910328"/>
+            <a:ext cx="3383280" cy="201168"/>
+          </a:xfrm>
+          <a:prstGeom prst="rect">
+            <a:avLst/>
+          </a:prstGeom>
+          <a:noFill/>
+        </p:spPr>
+        <p:txBody>
+          <a:bodyPr wrap="square" lIns="36000" tIns="18000" rIns="36000" bIns="18000">
+            <a:spAutoFit/>
+          </a:bodyPr>
+          <a:lstStyle/>
+          <a:p>
+            <a:r>
+              <a:rPr sz="1000" b="1">
+                <a:solidFill>
+                  <a:srgbClr val="1F2F3F"/>
+                </a:solidFill>
+                <a:latin typeface="Calibri"/>
+              </a:rPr>
+              <a:t>•  Pediatric thresholds (pSOFA, age-bands)</a:t>
+            </a:r>
+          </a:p>
+        </p:txBody>
+      </p:sp>
+      <p:sp>
+        <p:nvSpPr>
+          <p:cNvPr id="92" name="TextBox 91">
+            <a:extLst>
+              <a:ext uri="{FF2B5EF4-FFF2-40B4-BE49-F238E27FC236}">
+                <a16:creationId xmlns:a16="http://schemas.microsoft.com/office/drawing/2014/main" id="{54062506-C273-704E-8389-0FD437A81326}"/>
+              </a:ext>
+            </a:extLst>
+          </p:cNvPr>
+          <p:cNvSpPr txBox="1"/>
+          <p:nvPr/>
+        </p:nvSpPr>
+        <p:spPr>
+          <a:xfrm>
+            <a:off x="8595360" y="5111496"/>
+            <a:ext cx="3200400" cy="292608"/>
+          </a:xfrm>
+          <a:prstGeom prst="rect">
+            <a:avLst/>
+          </a:prstGeom>
+          <a:noFill/>
+        </p:spPr>
+        <p:txBody>
+          <a:bodyPr wrap="square" lIns="36000" tIns="18000" rIns="36000" bIns="18000">
+            <a:spAutoFit/>
+          </a:bodyPr>
+          <a:lstStyle/>
+          <a:p>
+            <a:r>
+              <a:rPr sz="900" b="0">
+                <a:solidFill>
+                  <a:srgbClr val="556677"/>
+                </a:solidFill>
+                <a:latin typeface="Calibri"/>
+              </a:rPr>
+              <a:t>Roadmap U16 — removes neonate confound</a:t>
+            </a:r>
+          </a:p>
+        </p:txBody>
+      </p:sp>
+      <p:sp>
+        <p:nvSpPr>
+          <p:cNvPr id="93" name="TextBox 92">
+            <a:extLst>
+              <a:ext uri="{FF2B5EF4-FFF2-40B4-BE49-F238E27FC236}">
+                <a16:creationId xmlns:a16="http://schemas.microsoft.com/office/drawing/2014/main" id="{A103A1F9-8616-C244-B934-EF6AD21E1FC0}"/>
+              </a:ext>
+            </a:extLst>
+          </p:cNvPr>
+          <p:cNvSpPr txBox="1"/>
+          <p:nvPr/>
+        </p:nvSpPr>
+        <p:spPr>
+          <a:xfrm>
+            <a:off x="8412480" y="5367528"/>
+            <a:ext cx="3383280" cy="201168"/>
+          </a:xfrm>
+          <a:prstGeom prst="rect">
+            <a:avLst/>
+          </a:prstGeom>
+          <a:noFill/>
+        </p:spPr>
+        <p:txBody>
+          <a:bodyPr wrap="square" lIns="36000" tIns="18000" rIns="36000" bIns="18000">
+            <a:spAutoFit/>
+          </a:bodyPr>
+          <a:lstStyle/>
+          <a:p>
+            <a:r>
+              <a:rPr sz="1000" b="1">
+                <a:solidFill>
+                  <a:srgbClr val="1F2F3F"/>
+                </a:solidFill>
+                <a:latin typeface="Calibri"/>
+              </a:rPr>
+              <a:t>•  Sepsis-3 derivation for ground truth</a:t>
+            </a:r>
+          </a:p>
+        </p:txBody>
+      </p:sp>
+      <p:sp>
+        <p:nvSpPr>
+          <p:cNvPr id="94" name="TextBox 93">
+            <a:extLst>
+              <a:ext uri="{FF2B5EF4-FFF2-40B4-BE49-F238E27FC236}">
+                <a16:creationId xmlns:a16="http://schemas.microsoft.com/office/drawing/2014/main" id="{FC88C950-ECC5-238E-8EB5-AB52CF235F2E}"/>
+              </a:ext>
+            </a:extLst>
+          </p:cNvPr>
+          <p:cNvSpPr txBox="1"/>
+          <p:nvPr/>
+        </p:nvSpPr>
+        <p:spPr>
+          <a:xfrm>
+            <a:off x="8595360" y="5568696"/>
+            <a:ext cx="3200400" cy="292608"/>
+          </a:xfrm>
+          <a:prstGeom prst="rect">
+            <a:avLst/>
+          </a:prstGeom>
+          <a:noFill/>
+        </p:spPr>
+        <p:txBody>
+          <a:bodyPr wrap="square" lIns="36000" tIns="18000" rIns="36000" bIns="18000">
+            <a:spAutoFit/>
+          </a:bodyPr>
+          <a:lstStyle/>
+          <a:p>
+            <a:r>
+              <a:rPr sz="900" b="0">
+                <a:solidFill>
+                  <a:srgbClr val="556677"/>
+                </a:solidFill>
+                <a:latin typeface="Calibri"/>
+              </a:rPr>
+              <a:t>Eliminates ICD-9 "missed coding" controls</a:t>
+            </a:r>
+          </a:p>
+        </p:txBody>
+      </p:sp>
+      <p:sp>
+        <p:nvSpPr>
+          <p:cNvPr id="95" name="TextBox 94">
+            <a:extLst>
+              <a:ext uri="{FF2B5EF4-FFF2-40B4-BE49-F238E27FC236}">
+                <a16:creationId xmlns:a16="http://schemas.microsoft.com/office/drawing/2014/main" id="{9087D441-31BD-C810-9D35-7A4F97EB55AD}"/>
+              </a:ext>
+            </a:extLst>
+          </p:cNvPr>
+          <p:cNvSpPr txBox="1"/>
+          <p:nvPr/>
+        </p:nvSpPr>
+        <p:spPr>
+          <a:xfrm>
+            <a:off x="8412480" y="5824728"/>
+            <a:ext cx="3383280" cy="201168"/>
+          </a:xfrm>
+          <a:prstGeom prst="rect">
+            <a:avLst/>
+          </a:prstGeom>
+          <a:noFill/>
+        </p:spPr>
+        <p:txBody>
+          <a:bodyPr wrap="square" lIns="36000" tIns="18000" rIns="36000" bIns="18000">
+            <a:spAutoFit/>
+          </a:bodyPr>
+          <a:lstStyle/>
+          <a:p>
+            <a:r>
+              <a:rPr sz="1000" b="1">
+                <a:solidFill>
+                  <a:srgbClr val="1F2F3F"/>
+                </a:solidFill>
+                <a:latin typeface="Calibri"/>
+              </a:rPr>
+              <a:t>•  Larger n (300+) for tight CIs</a:t>
+            </a:r>
+          </a:p>
+        </p:txBody>
+      </p:sp>
+      <p:sp>
+        <p:nvSpPr>
+          <p:cNvPr id="96" name="TextBox 95">
+            <a:extLst>
+              <a:ext uri="{FF2B5EF4-FFF2-40B4-BE49-F238E27FC236}">
+                <a16:creationId xmlns:a16="http://schemas.microsoft.com/office/drawing/2014/main" id="{ECEBFCAC-2FFE-2DD9-34D1-2E80928A4600}"/>
+              </a:ext>
+            </a:extLst>
+          </p:cNvPr>
+          <p:cNvSpPr txBox="1"/>
+          <p:nvPr/>
+        </p:nvSpPr>
+        <p:spPr>
+          <a:xfrm>
+            <a:off x="8595360" y="6025896"/>
+            <a:ext cx="3200400" cy="292608"/>
+          </a:xfrm>
+          <a:prstGeom prst="rect">
+            <a:avLst/>
+          </a:prstGeom>
+          <a:noFill/>
+        </p:spPr>
+        <p:txBody>
+          <a:bodyPr wrap="square" lIns="36000" tIns="18000" rIns="36000" bIns="18000">
+            <a:spAutoFit/>
+          </a:bodyPr>
+          <a:lstStyle/>
+          <a:p>
+            <a:r>
+              <a:rPr sz="900" b="0">
+                <a:solidFill>
+                  <a:srgbClr val="556677"/>
+                </a:solidFill>
+                <a:latin typeface="Calibri"/>
+              </a:rPr>
+              <a:t>Halves the ±15-pt confidence intervals</a:t>
+            </a:r>
+          </a:p>
+        </p:txBody>
+      </p:sp>
+      <p:sp>
+        <p:nvSpPr>
+          <p:cNvPr id="97" name="Rectangle 96">
+            <a:extLst>
+              <a:ext uri="{FF2B5EF4-FFF2-40B4-BE49-F238E27FC236}">
+                <a16:creationId xmlns:a16="http://schemas.microsoft.com/office/drawing/2014/main" id="{666D7AFC-82B4-635D-D5B8-7A79CA41D45E}"/>
+              </a:ext>
+            </a:extLst>
+          </p:cNvPr>
+          <p:cNvSpPr/>
+          <p:nvPr/>
+        </p:nvSpPr>
+        <p:spPr>
+          <a:xfrm>
+            <a:off x="731520" y="6355080"/>
+            <a:ext cx="10972800" cy="256032"/>
+          </a:xfrm>
+          <a:prstGeom prst="rect">
+            <a:avLst/>
+          </a:prstGeom>
+          <a:solidFill>
+            <a:srgbClr val="1E6C93"/>
+          </a:solidFill>
+          <a:ln>
+            <a:noFill/>
+          </a:ln>
+          <a:effectLst/>
+        </p:spPr>
+        <p:style>
+          <a:lnRef idx="1">
+            <a:schemeClr val="accent1"/>
+          </a:lnRef>
+          <a:fillRef idx="3">
+            <a:schemeClr val="accent1"/>
+          </a:fillRef>
+          <a:effectRef idx="2">
+            <a:schemeClr val="accent1"/>
+          </a:effectRef>
+          <a:fontRef idx="minor">
+            <a:schemeClr val="lt1"/>
+          </a:fontRef>
+        </p:style>
+        <p:txBody>
+          <a:bodyPr rtlCol="0" anchor="ctr"/>
+          <a:lstStyle/>
+          <a:p>
+            <a:pPr algn="ctr"/>
+            <a:endParaRPr/>
+          </a:p>
+        </p:txBody>
+      </p:sp>
+      <p:sp>
+        <p:nvSpPr>
+          <p:cNvPr id="99" name="TextBox 98">
+            <a:extLst>
+              <a:ext uri="{FF2B5EF4-FFF2-40B4-BE49-F238E27FC236}">
+                <a16:creationId xmlns:a16="http://schemas.microsoft.com/office/drawing/2014/main" id="{231088AA-0C18-B292-6636-334F59C1E85B}"/>
+              </a:ext>
+            </a:extLst>
+          </p:cNvPr>
+          <p:cNvSpPr txBox="1"/>
+          <p:nvPr/>
+        </p:nvSpPr>
+        <p:spPr>
+          <a:xfrm>
+            <a:off x="457200" y="6629400"/>
+            <a:ext cx="3657600" cy="182880"/>
+          </a:xfrm>
+          <a:prstGeom prst="rect">
+            <a:avLst/>
+          </a:prstGeom>
+          <a:noFill/>
+        </p:spPr>
+        <p:txBody>
+          <a:bodyPr wrap="square" lIns="36000" tIns="18000" rIns="36000" bIns="18000">
+            <a:spAutoFit/>
+          </a:bodyPr>
+          <a:lstStyle/>
+          <a:p>
+            <a:r>
+              <a:rPr sz="900" b="0">
+                <a:solidFill>
+                  <a:srgbClr val="556677"/>
+                </a:solidFill>
+                <a:latin typeface="Calibri"/>
+              </a:rPr>
+              <a:t>Sepsis GenAI  |  Medbeacon</a:t>
+            </a:r>
+          </a:p>
+        </p:txBody>
+      </p:sp>
+    </p:spTree>
+    <p:extLst>
+      <p:ext uri="{BB962C8B-B14F-4D97-AF65-F5344CB8AC3E}">
+        <p14:creationId xmlns:p14="http://schemas.microsoft.com/office/powerpoint/2010/main" val="975362191"/>
+      </p:ext>
+    </p:extLst>
   </p:cSld>
   <p:clrMapOvr>
     <a:masterClrMapping/>
